--- a/week6/ColeCh5_Ouspenskaia.pptx
+++ b/week6/ColeCh5_Ouspenskaia.pptx
@@ -5,7 +5,7 @@
     <p:sldMasterId id="2147483672" r:id="rId1"/>
   </p:sldMasterIdLst>
   <p:notesMasterIdLst>
-    <p:notesMasterId r:id="rId15"/>
+    <p:notesMasterId r:id="rId16"/>
   </p:notesMasterIdLst>
   <p:sldIdLst>
     <p:sldId id="256" r:id="rId2"/>
@@ -16,11 +16,12 @@
     <p:sldId id="266" r:id="rId7"/>
     <p:sldId id="259" r:id="rId8"/>
     <p:sldId id="267" r:id="rId9"/>
-    <p:sldId id="268" r:id="rId10"/>
-    <p:sldId id="269" r:id="rId11"/>
-    <p:sldId id="272" r:id="rId12"/>
-    <p:sldId id="270" r:id="rId13"/>
-    <p:sldId id="274" r:id="rId14"/>
+    <p:sldId id="275" r:id="rId10"/>
+    <p:sldId id="268" r:id="rId11"/>
+    <p:sldId id="269" r:id="rId12"/>
+    <p:sldId id="272" r:id="rId13"/>
+    <p:sldId id="270" r:id="rId14"/>
+    <p:sldId id="274" r:id="rId15"/>
   </p:sldIdLst>
   <p:sldSz cx="12192000" cy="6858000"/>
   <p:notesSz cx="6858000" cy="9144000"/>
@@ -691,6 +692,114 @@
         <p:cNvPr id="1" name="">
           <a:extLst>
             <a:ext uri="{FF2B5EF4-FFF2-40B4-BE49-F238E27FC236}">
+              <a16:creationId xmlns:a16="http://schemas.microsoft.com/office/drawing/2014/main" id="{6B441F78-BDA6-D48C-9A0A-C1EA7667A963}"/>
+            </a:ext>
+          </a:extLst>
+        </p:cNvPr>
+        <p:cNvGrpSpPr/>
+        <p:nvPr/>
+      </p:nvGrpSpPr>
+      <p:grpSpPr>
+        <a:xfrm>
+          <a:off x="0" y="0"/>
+          <a:ext cx="0" cy="0"/>
+          <a:chOff x="0" y="0"/>
+          <a:chExt cx="0" cy="0"/>
+        </a:xfrm>
+      </p:grpSpPr>
+      <p:sp>
+        <p:nvSpPr>
+          <p:cNvPr id="2" name="Slide Image Placeholder 1">
+            <a:extLst>
+              <a:ext uri="{FF2B5EF4-FFF2-40B4-BE49-F238E27FC236}">
+                <a16:creationId xmlns:a16="http://schemas.microsoft.com/office/drawing/2014/main" id="{785611DF-C053-D842-FD28-E10B873B92CE}"/>
+              </a:ext>
+            </a:extLst>
+          </p:cNvPr>
+          <p:cNvSpPr>
+            <a:spLocks noGrp="1" noRot="1" noChangeAspect="1"/>
+          </p:cNvSpPr>
+          <p:nvPr>
+            <p:ph type="sldImg"/>
+          </p:nvPr>
+        </p:nvSpPr>
+        <p:spPr/>
+      </p:sp>
+      <p:sp>
+        <p:nvSpPr>
+          <p:cNvPr id="3" name="Notes Placeholder 2">
+            <a:extLst>
+              <a:ext uri="{FF2B5EF4-FFF2-40B4-BE49-F238E27FC236}">
+                <a16:creationId xmlns:a16="http://schemas.microsoft.com/office/drawing/2014/main" id="{AA519F34-70E1-6991-E274-43615E8E876B}"/>
+              </a:ext>
+            </a:extLst>
+          </p:cNvPr>
+          <p:cNvSpPr>
+            <a:spLocks noGrp="1"/>
+          </p:cNvSpPr>
+          <p:nvPr>
+            <p:ph type="body" idx="1"/>
+          </p:nvPr>
+        </p:nvSpPr>
+        <p:spPr/>
+        <p:txBody>
+          <a:bodyPr/>
+          <a:lstStyle/>
+          <a:p>
+            <a:endParaRPr lang="en-US" dirty="0"/>
+          </a:p>
+        </p:txBody>
+      </p:sp>
+      <p:sp>
+        <p:nvSpPr>
+          <p:cNvPr id="4" name="Slide Number Placeholder 3">
+            <a:extLst>
+              <a:ext uri="{FF2B5EF4-FFF2-40B4-BE49-F238E27FC236}">
+                <a16:creationId xmlns:a16="http://schemas.microsoft.com/office/drawing/2014/main" id="{30F5D6AD-A9B2-F86B-57B6-418C9212103F}"/>
+              </a:ext>
+            </a:extLst>
+          </p:cNvPr>
+          <p:cNvSpPr>
+            <a:spLocks noGrp="1"/>
+          </p:cNvSpPr>
+          <p:nvPr>
+            <p:ph type="sldNum" sz="quarter" idx="5"/>
+          </p:nvPr>
+        </p:nvSpPr>
+        <p:spPr/>
+        <p:txBody>
+          <a:bodyPr/>
+          <a:lstStyle/>
+          <a:p>
+            <a:fld id="{32D02AEB-D71A-B841-8974-BDC9320FD368}" type="slidenum">
+              <a:rPr lang="en-US" smtClean="0"/>
+              <a:t>9</a:t>
+            </a:fld>
+            <a:endParaRPr lang="en-US"/>
+          </a:p>
+        </p:txBody>
+      </p:sp>
+    </p:spTree>
+    <p:extLst>
+      <p:ext uri="{BB962C8B-B14F-4D97-AF65-F5344CB8AC3E}">
+        <p14:creationId xmlns:p14="http://schemas.microsoft.com/office/powerpoint/2010/main" val="2929162149"/>
+      </p:ext>
+    </p:extLst>
+  </p:cSld>
+  <p:clrMapOvr>
+    <a:masterClrMapping/>
+  </p:clrMapOvr>
+</p:notes>
+</file>
+
+<file path=ppt/notesSlides/notesSlide4.xml><?xml version="1.0" encoding="utf-8"?>
+<p:notes xmlns:a="http://schemas.openxmlformats.org/drawingml/2006/main" xmlns:r="http://schemas.openxmlformats.org/officeDocument/2006/relationships" xmlns:p="http://schemas.openxmlformats.org/presentationml/2006/main">
+  <p:cSld>
+    <p:spTree>
+      <p:nvGrpSpPr>
+        <p:cNvPr id="1" name="">
+          <a:extLst>
+            <a:ext uri="{FF2B5EF4-FFF2-40B4-BE49-F238E27FC236}">
               <a16:creationId xmlns:a16="http://schemas.microsoft.com/office/drawing/2014/main" id="{17FB2BA9-2939-0751-564A-DFF0E3602E15}"/>
             </a:ext>
           </a:extLst>
@@ -772,7 +881,7 @@
           <a:p>
             <a:fld id="{32D02AEB-D71A-B841-8974-BDC9320FD368}" type="slidenum">
               <a:rPr lang="en-US" smtClean="0"/>
-              <a:t>9</a:t>
+              <a:t>10</a:t>
             </a:fld>
             <a:endParaRPr lang="en-US"/>
           </a:p>
@@ -791,7 +900,7 @@
 </p:notes>
 </file>
 
-<file path=ppt/notesSlides/notesSlide4.xml><?xml version="1.0" encoding="utf-8"?>
+<file path=ppt/notesSlides/notesSlide5.xml><?xml version="1.0" encoding="utf-8"?>
 <p:notes xmlns:a="http://schemas.openxmlformats.org/drawingml/2006/main" xmlns:r="http://schemas.openxmlformats.org/officeDocument/2006/relationships" xmlns:p="http://schemas.openxmlformats.org/presentationml/2006/main">
   <p:cSld>
     <p:spTree>
@@ -880,7 +989,7 @@
           <a:p>
             <a:fld id="{32D02AEB-D71A-B841-8974-BDC9320FD368}" type="slidenum">
               <a:rPr lang="en-US" smtClean="0"/>
-              <a:t>10</a:t>
+              <a:t>11</a:t>
             </a:fld>
             <a:endParaRPr lang="en-US"/>
           </a:p>
@@ -899,7 +1008,7 @@
 </p:notes>
 </file>
 
-<file path=ppt/notesSlides/notesSlide5.xml><?xml version="1.0" encoding="utf-8"?>
+<file path=ppt/notesSlides/notesSlide6.xml><?xml version="1.0" encoding="utf-8"?>
 <p:notes xmlns:a="http://schemas.openxmlformats.org/drawingml/2006/main" xmlns:r="http://schemas.openxmlformats.org/officeDocument/2006/relationships" xmlns:p="http://schemas.openxmlformats.org/presentationml/2006/main">
   <p:cSld>
     <p:spTree>
@@ -1027,7 +1136,7 @@
           <a:p>
             <a:fld id="{32D02AEB-D71A-B841-8974-BDC9320FD368}" type="slidenum">
               <a:rPr lang="en-US" smtClean="0"/>
-              <a:t>11</a:t>
+              <a:t>12</a:t>
             </a:fld>
             <a:endParaRPr lang="en-US"/>
           </a:p>
@@ -1046,7 +1155,7 @@
 </p:notes>
 </file>
 
-<file path=ppt/notesSlides/notesSlide6.xml><?xml version="1.0" encoding="utf-8"?>
+<file path=ppt/notesSlides/notesSlide7.xml><?xml version="1.0" encoding="utf-8"?>
 <p:notes xmlns:a="http://schemas.openxmlformats.org/drawingml/2006/main" xmlns:r="http://schemas.openxmlformats.org/officeDocument/2006/relationships" xmlns:p="http://schemas.openxmlformats.org/presentationml/2006/main">
   <p:cSld>
     <p:spTree>
@@ -1143,7 +1252,7 @@
           <a:p>
             <a:fld id="{32D02AEB-D71A-B841-8974-BDC9320FD368}" type="slidenum">
               <a:rPr lang="en-US" smtClean="0"/>
-              <a:t>12</a:t>
+              <a:t>13</a:t>
             </a:fld>
             <a:endParaRPr lang="en-US"/>
           </a:p>
@@ -1162,7 +1271,7 @@
 </p:notes>
 </file>
 
-<file path=ppt/notesSlides/notesSlide7.xml><?xml version="1.0" encoding="utf-8"?>
+<file path=ppt/notesSlides/notesSlide8.xml><?xml version="1.0" encoding="utf-8"?>
 <p:notes xmlns:a="http://schemas.openxmlformats.org/drawingml/2006/main" xmlns:r="http://schemas.openxmlformats.org/officeDocument/2006/relationships" xmlns:p="http://schemas.openxmlformats.org/presentationml/2006/main">
   <p:cSld>
     <p:spTree>
@@ -1374,7 +1483,7 @@
           <a:p>
             <a:fld id="{32D02AEB-D71A-B841-8974-BDC9320FD368}" type="slidenum">
               <a:rPr lang="en-US" smtClean="0"/>
-              <a:t>13</a:t>
+              <a:t>14</a:t>
             </a:fld>
             <a:endParaRPr lang="en-US"/>
           </a:p>
@@ -13022,7 +13131,7 @@
         <p:cNvPr id="1" name="">
           <a:extLst>
             <a:ext uri="{FF2B5EF4-FFF2-40B4-BE49-F238E27FC236}">
-              <a16:creationId xmlns:a16="http://schemas.microsoft.com/office/drawing/2014/main" id="{7839A4ED-4C1F-7643-12B7-9B8DB8BDF981}"/>
+              <a16:creationId xmlns:a16="http://schemas.microsoft.com/office/drawing/2014/main" id="{2C1C4B36-9B00-D17D-3D11-D3EC6B41A54E}"/>
             </a:ext>
           </a:extLst>
         </p:cNvPr>
@@ -13042,7 +13151,7 @@
           <p:cNvPr id="3" name="Date Placeholder 2">
             <a:extLst>
               <a:ext uri="{FF2B5EF4-FFF2-40B4-BE49-F238E27FC236}">
-                <a16:creationId xmlns:a16="http://schemas.microsoft.com/office/drawing/2014/main" id="{DCF562BA-0B60-4860-2684-8B711C71EC06}"/>
+                <a16:creationId xmlns:a16="http://schemas.microsoft.com/office/drawing/2014/main" id="{D3A3FC5D-38A7-6106-D99B-E377EAAB508F}"/>
               </a:ext>
             </a:extLst>
           </p:cNvPr>
@@ -13071,7 +13180,7 @@
           <p:cNvPr id="4" name="Slide Number Placeholder 3">
             <a:extLst>
               <a:ext uri="{FF2B5EF4-FFF2-40B4-BE49-F238E27FC236}">
-                <a16:creationId xmlns:a16="http://schemas.microsoft.com/office/drawing/2014/main" id="{B9B36011-6662-B612-B011-9B396D7C14AB}"/>
+                <a16:creationId xmlns:a16="http://schemas.microsoft.com/office/drawing/2014/main" id="{338E1671-51C7-C5B3-CDEE-1655EF8B3891}"/>
               </a:ext>
             </a:extLst>
           </p:cNvPr>
@@ -13100,7 +13209,7 @@
           <p:cNvPr id="7" name="TextBox 6">
             <a:extLst>
               <a:ext uri="{FF2B5EF4-FFF2-40B4-BE49-F238E27FC236}">
-                <a16:creationId xmlns:a16="http://schemas.microsoft.com/office/drawing/2014/main" id="{05294F00-ADDD-5C6D-45F8-0469C3B88098}"/>
+                <a16:creationId xmlns:a16="http://schemas.microsoft.com/office/drawing/2014/main" id="{84000C52-9685-6BBB-2FEA-B906EDF58E0B}"/>
               </a:ext>
             </a:extLst>
           </p:cNvPr>
@@ -13138,7 +13247,7 @@
           <p:cNvPr id="6" name="Title 1">
             <a:extLst>
               <a:ext uri="{FF2B5EF4-FFF2-40B4-BE49-F238E27FC236}">
-                <a16:creationId xmlns:a16="http://schemas.microsoft.com/office/drawing/2014/main" id="{E57DCEE2-B8D7-C7AE-09AD-5853035671A8}"/>
+                <a16:creationId xmlns:a16="http://schemas.microsoft.com/office/drawing/2014/main" id="{C748431A-A4A5-6CFA-9D41-04577CB28023}"/>
               </a:ext>
             </a:extLst>
           </p:cNvPr>
@@ -13231,7 +13340,7 @@
           <p:cNvPr id="8" name="TextBox 7">
             <a:extLst>
               <a:ext uri="{FF2B5EF4-FFF2-40B4-BE49-F238E27FC236}">
-                <a16:creationId xmlns:a16="http://schemas.microsoft.com/office/drawing/2014/main" id="{E5808F31-8278-659D-B30B-9B5CB74D2755}"/>
+                <a16:creationId xmlns:a16="http://schemas.microsoft.com/office/drawing/2014/main" id="{50DC1195-0309-3E49-0AFD-EF57C13F15EA}"/>
               </a:ext>
             </a:extLst>
           </p:cNvPr>
@@ -13269,7 +13378,7 @@
           <p:cNvPr id="9" name="Title 1">
             <a:extLst>
               <a:ext uri="{FF2B5EF4-FFF2-40B4-BE49-F238E27FC236}">
-                <a16:creationId xmlns:a16="http://schemas.microsoft.com/office/drawing/2014/main" id="{D704C17B-EDA2-E890-E2B4-CD1589366249}"/>
+                <a16:creationId xmlns:a16="http://schemas.microsoft.com/office/drawing/2014/main" id="{123AFBDA-99A7-7B72-CF40-905E85DD1D51}"/>
               </a:ext>
             </a:extLst>
           </p:cNvPr>
@@ -13340,6 +13449,370 @@
           <p:cNvPr id="2" name="Picture 1">
             <a:extLst>
               <a:ext uri="{FF2B5EF4-FFF2-40B4-BE49-F238E27FC236}">
+                <a16:creationId xmlns:a16="http://schemas.microsoft.com/office/drawing/2014/main" id="{C44D6088-A9CF-9A2E-DA70-0448707536A2}"/>
+              </a:ext>
+            </a:extLst>
+          </p:cNvPr>
+          <p:cNvPicPr>
+            <a:picLocks noChangeAspect="1"/>
+          </p:cNvPicPr>
+          <p:nvPr/>
+        </p:nvPicPr>
+        <p:blipFill>
+          <a:blip r:embed="rId3"/>
+          <a:stretch>
+            <a:fillRect/>
+          </a:stretch>
+        </p:blipFill>
+        <p:spPr>
+          <a:xfrm>
+            <a:off x="3770153" y="1627786"/>
+            <a:ext cx="7772400" cy="4424548"/>
+          </a:xfrm>
+          <a:prstGeom prst="rect">
+            <a:avLst/>
+          </a:prstGeom>
+        </p:spPr>
+      </p:pic>
+    </p:spTree>
+    <p:extLst>
+      <p:ext uri="{BB962C8B-B14F-4D97-AF65-F5344CB8AC3E}">
+        <p14:creationId xmlns:p14="http://schemas.microsoft.com/office/powerpoint/2010/main" val="1625813769"/>
+      </p:ext>
+    </p:extLst>
+  </p:cSld>
+  <p:clrMapOvr>
+    <a:masterClrMapping/>
+  </p:clrMapOvr>
+</p:sld>
+</file>
+
+<file path=ppt/slides/slide11.xml><?xml version="1.0" encoding="utf-8"?>
+<p:sld xmlns:a="http://schemas.openxmlformats.org/drawingml/2006/main" xmlns:r="http://schemas.openxmlformats.org/officeDocument/2006/relationships" xmlns:p="http://schemas.openxmlformats.org/presentationml/2006/main">
+  <p:cSld>
+    <p:spTree>
+      <p:nvGrpSpPr>
+        <p:cNvPr id="1" name="">
+          <a:extLst>
+            <a:ext uri="{FF2B5EF4-FFF2-40B4-BE49-F238E27FC236}">
+              <a16:creationId xmlns:a16="http://schemas.microsoft.com/office/drawing/2014/main" id="{7839A4ED-4C1F-7643-12B7-9B8DB8BDF981}"/>
+            </a:ext>
+          </a:extLst>
+        </p:cNvPr>
+        <p:cNvGrpSpPr/>
+        <p:nvPr/>
+      </p:nvGrpSpPr>
+      <p:grpSpPr>
+        <a:xfrm>
+          <a:off x="0" y="0"/>
+          <a:ext cx="0" cy="0"/>
+          <a:chOff x="0" y="0"/>
+          <a:chExt cx="0" cy="0"/>
+        </a:xfrm>
+      </p:grpSpPr>
+      <p:sp>
+        <p:nvSpPr>
+          <p:cNvPr id="3" name="Date Placeholder 2">
+            <a:extLst>
+              <a:ext uri="{FF2B5EF4-FFF2-40B4-BE49-F238E27FC236}">
+                <a16:creationId xmlns:a16="http://schemas.microsoft.com/office/drawing/2014/main" id="{DCF562BA-0B60-4860-2684-8B711C71EC06}"/>
+              </a:ext>
+            </a:extLst>
+          </p:cNvPr>
+          <p:cNvSpPr>
+            <a:spLocks noGrp="1"/>
+          </p:cNvSpPr>
+          <p:nvPr>
+            <p:ph type="dt" sz="half" idx="14"/>
+          </p:nvPr>
+        </p:nvSpPr>
+        <p:spPr/>
+        <p:txBody>
+          <a:bodyPr/>
+          <a:lstStyle/>
+          <a:p>
+            <a:fld id="{5EC926B4-4344-4B16-B7A4-2D405F7C8DB5}" type="datetime1">
+              <a:rPr/>
+              <a:t>10/7/26</a:t>
+            </a:fld>
+            <a:endParaRPr lang="en-US" dirty="0"/>
+          </a:p>
+        </p:txBody>
+      </p:sp>
+      <p:sp>
+        <p:nvSpPr>
+          <p:cNvPr id="4" name="Slide Number Placeholder 3">
+            <a:extLst>
+              <a:ext uri="{FF2B5EF4-FFF2-40B4-BE49-F238E27FC236}">
+                <a16:creationId xmlns:a16="http://schemas.microsoft.com/office/drawing/2014/main" id="{B9B36011-6662-B612-B011-9B396D7C14AB}"/>
+              </a:ext>
+            </a:extLst>
+          </p:cNvPr>
+          <p:cNvSpPr>
+            <a:spLocks noGrp="1"/>
+          </p:cNvSpPr>
+          <p:nvPr>
+            <p:ph type="sldNum" sz="quarter" idx="16"/>
+          </p:nvPr>
+        </p:nvSpPr>
+        <p:spPr/>
+        <p:txBody>
+          <a:bodyPr/>
+          <a:lstStyle/>
+          <a:p>
+            <a:fld id="{5E0677F5-4A8A-4BF1-96BE-3BAE8FBAFE2E}" type="slidenum">
+              <a:rPr lang="en-US" dirty="0"/>
+              <a:t>11</a:t>
+            </a:fld>
+            <a:endParaRPr lang="en-US"/>
+          </a:p>
+        </p:txBody>
+      </p:sp>
+      <p:sp>
+        <p:nvSpPr>
+          <p:cNvPr id="7" name="TextBox 6">
+            <a:extLst>
+              <a:ext uri="{FF2B5EF4-FFF2-40B4-BE49-F238E27FC236}">
+                <a16:creationId xmlns:a16="http://schemas.microsoft.com/office/drawing/2014/main" id="{05294F00-ADDD-5C6D-45F8-0469C3B88098}"/>
+              </a:ext>
+            </a:extLst>
+          </p:cNvPr>
+          <p:cNvSpPr txBox="1"/>
+          <p:nvPr/>
+        </p:nvSpPr>
+        <p:spPr>
+          <a:xfrm>
+            <a:off x="11720079" y="270742"/>
+            <a:ext cx="357908" cy="246221"/>
+          </a:xfrm>
+          <a:prstGeom prst="rect">
+            <a:avLst/>
+          </a:prstGeom>
+          <a:noFill/>
+        </p:spPr>
+        <p:txBody>
+          <a:bodyPr rot="0" spcFirstLastPara="0" vertOverflow="overflow" horzOverflow="overflow" vert="horz" wrap="square" lIns="91440" tIns="45720" rIns="91440" bIns="45720" numCol="1" spcCol="0" rtlCol="0" fromWordArt="0" anchor="t" anchorCtr="0" forceAA="0" compatLnSpc="1">
+            <a:prstTxWarp prst="textNoShape">
+              <a:avLst/>
+            </a:prstTxWarp>
+            <a:spAutoFit/>
+          </a:bodyPr>
+          <a:lstStyle/>
+          <a:p>
+            <a:r>
+              <a:rPr lang="en-US" sz="1000" dirty="0"/>
+              <a:t>/13</a:t>
+            </a:r>
+          </a:p>
+        </p:txBody>
+      </p:sp>
+      <p:sp>
+        <p:nvSpPr>
+          <p:cNvPr id="6" name="Title 1">
+            <a:extLst>
+              <a:ext uri="{FF2B5EF4-FFF2-40B4-BE49-F238E27FC236}">
+                <a16:creationId xmlns:a16="http://schemas.microsoft.com/office/drawing/2014/main" id="{E57DCEE2-B8D7-C7AE-09AD-5853035671A8}"/>
+              </a:ext>
+            </a:extLst>
+          </p:cNvPr>
+          <p:cNvSpPr>
+            <a:spLocks noGrp="1"/>
+          </p:cNvSpPr>
+          <p:nvPr>
+            <p:ph type="title"/>
+          </p:nvPr>
+        </p:nvSpPr>
+        <p:spPr>
+          <a:xfrm>
+            <a:off x="211337" y="869738"/>
+            <a:ext cx="2939186" cy="2096814"/>
+          </a:xfrm>
+        </p:spPr>
+        <p:txBody>
+          <a:bodyPr>
+            <a:normAutofit fontScale="90000"/>
+          </a:bodyPr>
+          <a:lstStyle/>
+          <a:p>
+            <a:r>
+              <a:rPr lang="en-US" sz="2000" dirty="0">
+                <a:latin typeface="Arial"/>
+                <a:cs typeface="Arial"/>
+              </a:rPr>
+              <a:t>Affordances</a:t>
+            </a:r>
+            <a:br>
+              <a:rPr lang="en-US" sz="2000" dirty="0">
+                <a:latin typeface="Arial"/>
+                <a:cs typeface="Arial"/>
+              </a:rPr>
+            </a:br>
+            <a:br>
+              <a:rPr lang="en-US" sz="2000" dirty="0">
+                <a:latin typeface="Arial"/>
+                <a:cs typeface="Arial"/>
+              </a:rPr>
+            </a:br>
+            <a:r>
+              <a:rPr lang="en-US" sz="4000" dirty="0">
+                <a:latin typeface="Arial"/>
+                <a:cs typeface="Arial"/>
+              </a:rPr>
+              <a:t>Accessibility</a:t>
+            </a:r>
+            <a:br>
+              <a:rPr lang="en-US" sz="2000" dirty="0">
+                <a:latin typeface="Arial"/>
+                <a:cs typeface="Arial"/>
+              </a:rPr>
+            </a:br>
+            <a:br>
+              <a:rPr lang="en-US" sz="2000" dirty="0"/>
+            </a:br>
+            <a:r>
+              <a:rPr lang="en-US" sz="2000" dirty="0">
+                <a:latin typeface="Arial"/>
+                <a:cs typeface="Arial"/>
+              </a:rPr>
+              <a:t>Aesthetics</a:t>
+            </a:r>
+            <a:br>
+              <a:rPr lang="en-US" sz="2000" dirty="0">
+                <a:latin typeface="Arial"/>
+                <a:cs typeface="Arial"/>
+              </a:rPr>
+            </a:br>
+            <a:br>
+              <a:rPr lang="en-US" sz="2000" dirty="0"/>
+            </a:br>
+            <a:r>
+              <a:rPr lang="en-US" sz="2000" dirty="0">
+                <a:latin typeface="Arial"/>
+                <a:cs typeface="Arial"/>
+              </a:rPr>
+              <a:t>Acceptance</a:t>
+            </a:r>
+            <a:br>
+              <a:rPr lang="en-US" dirty="0"/>
+            </a:br>
+            <a:endParaRPr lang="en-US" dirty="0"/>
+          </a:p>
+        </p:txBody>
+      </p:sp>
+      <p:sp>
+        <p:nvSpPr>
+          <p:cNvPr id="8" name="TextBox 7">
+            <a:extLst>
+              <a:ext uri="{FF2B5EF4-FFF2-40B4-BE49-F238E27FC236}">
+                <a16:creationId xmlns:a16="http://schemas.microsoft.com/office/drawing/2014/main" id="{E5808F31-8278-659D-B30B-9B5CB74D2755}"/>
+              </a:ext>
+            </a:extLst>
+          </p:cNvPr>
+          <p:cNvSpPr txBox="1"/>
+          <p:nvPr/>
+        </p:nvSpPr>
+        <p:spPr>
+          <a:xfrm>
+            <a:off x="164756" y="15914"/>
+            <a:ext cx="1710444" cy="682273"/>
+          </a:xfrm>
+          <a:prstGeom prst="rect">
+            <a:avLst/>
+          </a:prstGeom>
+          <a:solidFill>
+            <a:schemeClr val="bg1"/>
+          </a:solidFill>
+        </p:spPr>
+        <p:txBody>
+          <a:bodyPr rot="0" spcFirstLastPara="0" vertOverflow="overflow" horzOverflow="overflow" vert="horz" wrap="square" lIns="91440" tIns="45720" rIns="91440" bIns="45720" numCol="1" spcCol="0" rtlCol="0" fromWordArt="0" anchor="t" anchorCtr="0" forceAA="0" compatLnSpc="1">
+            <a:prstTxWarp prst="textNoShape">
+              <a:avLst/>
+            </a:prstTxWarp>
+            <a:spAutoFit/>
+          </a:bodyPr>
+          <a:lstStyle/>
+          <a:p>
+            <a:pPr algn="l"/>
+            <a:endParaRPr lang="en-US"/>
+          </a:p>
+        </p:txBody>
+      </p:sp>
+      <p:sp>
+        <p:nvSpPr>
+          <p:cNvPr id="9" name="Title 1">
+            <a:extLst>
+              <a:ext uri="{FF2B5EF4-FFF2-40B4-BE49-F238E27FC236}">
+                <a16:creationId xmlns:a16="http://schemas.microsoft.com/office/drawing/2014/main" id="{D704C17B-EDA2-E890-E2B4-CD1589366249}"/>
+              </a:ext>
+            </a:extLst>
+          </p:cNvPr>
+          <p:cNvSpPr txBox="1">
+            <a:spLocks/>
+          </p:cNvSpPr>
+          <p:nvPr/>
+        </p:nvSpPr>
+        <p:spPr>
+          <a:xfrm>
+            <a:off x="6385330" y="222569"/>
+            <a:ext cx="4230023" cy="486227"/>
+          </a:xfrm>
+          <a:prstGeom prst="rect">
+            <a:avLst/>
+          </a:prstGeom>
+        </p:spPr>
+        <p:txBody>
+          <a:bodyPr vert="horz" lIns="91440" tIns="45720" rIns="91440" bIns="45720" rtlCol="0" anchor="t">
+            <a:normAutofit fontScale="97500" lnSpcReduction="10000"/>
+          </a:bodyPr>
+          <a:lstStyle>
+            <a:lvl1pPr algn="l" defTabSz="914400" rtl="0" eaLnBrk="1" latinLnBrk="0" hangingPunct="1">
+              <a:lnSpc>
+                <a:spcPct val="85000"/>
+              </a:lnSpc>
+              <a:spcBef>
+                <a:spcPct val="0"/>
+              </a:spcBef>
+              <a:buNone/>
+              <a:defRPr lang="en-US" sz="2800" b="0" kern="1200" spc="0" baseline="0" dirty="0">
+                <a:solidFill>
+                  <a:schemeClr val="tx1"/>
+                </a:solidFill>
+                <a:latin typeface="+mj-lt"/>
+                <a:ea typeface="+mj-ea"/>
+                <a:cs typeface="+mj-cs"/>
+              </a:defRPr>
+            </a:lvl1pPr>
+          </a:lstStyle>
+          <a:p>
+            <a:r>
+              <a:rPr lang="en-US" sz="3200" dirty="0">
+                <a:solidFill>
+                  <a:srgbClr val="F2F2F2"/>
+                </a:solidFill>
+                <a:latin typeface="Arial"/>
+                <a:cs typeface="Arial"/>
+              </a:rPr>
+              <a:t>      </a:t>
+            </a:r>
+            <a:r>
+              <a:rPr lang="en-US" sz="2100" dirty="0">
+                <a:solidFill>
+                  <a:srgbClr val="F2F2F2"/>
+                </a:solidFill>
+                <a:latin typeface="Arial"/>
+                <a:cs typeface="Arial"/>
+              </a:rPr>
+              <a:t>Cole Chapter 5                      </a:t>
+            </a:r>
+            <a:endParaRPr lang="en-US" sz="2100" dirty="0"/>
+          </a:p>
+        </p:txBody>
+      </p:sp>
+      <p:pic>
+        <p:nvPicPr>
+          <p:cNvPr id="2" name="Picture 1">
+            <a:extLst>
+              <a:ext uri="{FF2B5EF4-FFF2-40B4-BE49-F238E27FC236}">
                 <a16:creationId xmlns:a16="http://schemas.microsoft.com/office/drawing/2014/main" id="{8CBC268E-BE73-6CB7-D0B2-9CD3E766CB2A}"/>
               </a:ext>
             </a:extLst>
@@ -13378,7 +13851,7 @@
 </p:sld>
 </file>
 
-<file path=ppt/slides/slide11.xml><?xml version="1.0" encoding="utf-8"?>
+<file path=ppt/slides/slide12.xml><?xml version="1.0" encoding="utf-8"?>
 <p:sld xmlns:a="http://schemas.openxmlformats.org/drawingml/2006/main" xmlns:r="http://schemas.openxmlformats.org/officeDocument/2006/relationships" xmlns:p="http://schemas.openxmlformats.org/presentationml/2006/main">
   <p:cSld>
     <p:spTree>
@@ -13453,7 +13926,7 @@
           <a:p>
             <a:fld id="{5E0677F5-4A8A-4BF1-96BE-3BAE8FBAFE2E}" type="slidenum">
               <a:rPr lang="en-US" dirty="0"/>
-              <a:t>11</a:t>
+              <a:t>12</a:t>
             </a:fld>
             <a:endParaRPr lang="en-US"/>
           </a:p>
@@ -13821,7 +14294,7 @@
 </p:sld>
 </file>
 
-<file path=ppt/slides/slide12.xml><?xml version="1.0" encoding="utf-8"?>
+<file path=ppt/slides/slide13.xml><?xml version="1.0" encoding="utf-8"?>
 <p:sld xmlns:a="http://schemas.openxmlformats.org/drawingml/2006/main" xmlns:r="http://schemas.openxmlformats.org/officeDocument/2006/relationships" xmlns:p="http://schemas.openxmlformats.org/presentationml/2006/main">
   <p:cSld>
     <p:spTree>
@@ -13896,7 +14369,7 @@
           <a:p>
             <a:fld id="{5E0677F5-4A8A-4BF1-96BE-3BAE8FBAFE2E}" type="slidenum">
               <a:rPr lang="en-US" dirty="0"/>
-              <a:t>12</a:t>
+              <a:t>13</a:t>
             </a:fld>
             <a:endParaRPr lang="en-US"/>
           </a:p>
@@ -14164,7 +14637,7 @@
         </p:blipFill>
         <p:spPr>
           <a:xfrm>
-            <a:off x="2217292" y="2801923"/>
+            <a:off x="1974011" y="2801923"/>
             <a:ext cx="4976406" cy="3845963"/>
           </a:xfrm>
           <a:prstGeom prst="rect">
@@ -14194,8 +14667,8 @@
         </p:blipFill>
         <p:spPr>
           <a:xfrm>
-            <a:off x="7550092" y="2801923"/>
-            <a:ext cx="4355706" cy="3844004"/>
+            <a:off x="7364373" y="2791427"/>
+            <a:ext cx="4464104" cy="3844004"/>
           </a:xfrm>
           <a:prstGeom prst="rect">
             <a:avLst/>
@@ -14215,7 +14688,7 @@
 </p:sld>
 </file>
 
-<file path=ppt/slides/slide13.xml><?xml version="1.0" encoding="utf-8"?>
+<file path=ppt/slides/slide14.xml><?xml version="1.0" encoding="utf-8"?>
 <p:sld xmlns:a="http://schemas.openxmlformats.org/drawingml/2006/main" xmlns:r="http://schemas.openxmlformats.org/officeDocument/2006/relationships" xmlns:p="http://schemas.openxmlformats.org/presentationml/2006/main">
   <p:cSld>
     <p:spTree>
@@ -14290,7 +14763,7 @@
           <a:p>
             <a:fld id="{5E0677F5-4A8A-4BF1-96BE-3BAE8FBAFE2E}" type="slidenum">
               <a:rPr lang="en-US" dirty="0"/>
-              <a:t>13</a:t>
+              <a:t>14</a:t>
             </a:fld>
             <a:endParaRPr lang="en-US"/>
           </a:p>
@@ -14462,10 +14935,9 @@
           <a:lstStyle/>
           <a:p>
             <a:r>
-              <a:rPr lang="en-US" sz="1000"/>
+              <a:rPr lang="en-US" sz="1000" dirty="0"/>
               <a:t>/13</a:t>
             </a:r>
-            <a:endParaRPr lang="en-US" sz="1000" dirty="0"/>
           </a:p>
         </p:txBody>
       </p:sp>
@@ -14795,8 +15267,8 @@
         </p:nvSpPr>
         <p:spPr>
           <a:xfrm>
-            <a:off x="5472545" y="1923918"/>
-            <a:ext cx="5239327" cy="3746258"/>
+            <a:off x="6501468" y="1923918"/>
+            <a:ext cx="4210404" cy="3746258"/>
           </a:xfrm>
         </p:spPr>
         <p:txBody>
@@ -14888,58 +15360,6 @@
       </p:sp>
       <p:sp>
         <p:nvSpPr>
-          <p:cNvPr id="2" name="Title 1">
-            <a:extLst>
-              <a:ext uri="{FF2B5EF4-FFF2-40B4-BE49-F238E27FC236}">
-                <a16:creationId xmlns:a16="http://schemas.microsoft.com/office/drawing/2014/main" id="{9D868EC8-B47B-5CAF-3FB0-E869B0DEEC38}"/>
-              </a:ext>
-            </a:extLst>
-          </p:cNvPr>
-          <p:cNvSpPr>
-            <a:spLocks noGrp="1"/>
-          </p:cNvSpPr>
-          <p:nvPr>
-            <p:ph type="title"/>
-          </p:nvPr>
-        </p:nvSpPr>
-        <p:spPr>
-          <a:xfrm>
-            <a:off x="6385330" y="222569"/>
-            <a:ext cx="4230023" cy="486227"/>
-          </a:xfrm>
-        </p:spPr>
-        <p:txBody>
-          <a:bodyPr>
-            <a:normAutofit fontScale="90000"/>
-          </a:bodyPr>
-          <a:lstStyle/>
-          <a:p>
-            <a:r>
-              <a:rPr lang="en-US" sz="3200" dirty="0">
-                <a:solidFill>
-                  <a:srgbClr val="F2F2F2"/>
-                </a:solidFill>
-                <a:latin typeface="Arial"/>
-                <a:cs typeface="Arial"/>
-              </a:rPr>
-              <a:t>      </a:t>
-            </a:r>
-            <a:r>
-              <a:rPr lang="en-US" sz="2200" dirty="0">
-                <a:solidFill>
-                  <a:srgbClr val="F2F2F2"/>
-                </a:solidFill>
-                <a:latin typeface="Arial"/>
-                <a:cs typeface="Arial"/>
-              </a:rPr>
-              <a:t>Cole Chapter 5                      </a:t>
-            </a:r>
-            <a:endParaRPr lang="en-US" sz="2200" dirty="0"/>
-          </a:p>
-        </p:txBody>
-      </p:sp>
-      <p:sp>
-        <p:nvSpPr>
           <p:cNvPr id="12" name="TextBox 11">
             <a:extLst>
               <a:ext uri="{FF2B5EF4-FFF2-40B4-BE49-F238E27FC236}">
@@ -14952,8 +15372,8 @@
         </p:nvSpPr>
         <p:spPr>
           <a:xfrm>
-            <a:off x="549564" y="892387"/>
-            <a:ext cx="3411682" cy="923330"/>
+            <a:off x="549563" y="892387"/>
+            <a:ext cx="4995560" cy="923330"/>
           </a:xfrm>
           <a:prstGeom prst="rect">
             <a:avLst/>
@@ -14976,15 +15396,7 @@
                 </a:solidFill>
                 <a:latin typeface="Arial"/>
               </a:rPr>
-              <a:t>Overview</a:t>
-            </a:r>
-            <a:r>
-              <a:rPr sz="3600" dirty="0">
-                <a:latin typeface="Arial"/>
-                <a:ea typeface="Arial"/>
-                <a:cs typeface="Arial"/>
-              </a:rPr>
-              <a:t>​</a:t>
+              <a:t>Chapter 5 Overview</a:t>
             </a:r>
             <a:endParaRPr lang="en-US" sz="3600" dirty="0"/>
           </a:p>
@@ -14994,6 +15406,36 @@
           </a:p>
         </p:txBody>
       </p:sp>
+      <p:pic>
+        <p:nvPicPr>
+          <p:cNvPr id="10" name="Picture 9">
+            <a:extLst>
+              <a:ext uri="{FF2B5EF4-FFF2-40B4-BE49-F238E27FC236}">
+                <a16:creationId xmlns:a16="http://schemas.microsoft.com/office/drawing/2014/main" id="{72E45515-FBEA-97C1-C84B-ECF266E9DE71}"/>
+              </a:ext>
+            </a:extLst>
+          </p:cNvPr>
+          <p:cNvPicPr>
+            <a:picLocks noChangeAspect="1"/>
+          </p:cNvPicPr>
+          <p:nvPr/>
+        </p:nvPicPr>
+        <p:blipFill>
+          <a:blip r:embed="rId2"/>
+          <a:stretch>
+            <a:fillRect/>
+          </a:stretch>
+        </p:blipFill>
+        <p:spPr>
+          <a:xfrm>
+            <a:off x="1019978" y="1743742"/>
+            <a:ext cx="3660636" cy="4552195"/>
+          </a:xfrm>
+          <a:prstGeom prst="rect">
+            <a:avLst/>
+          </a:prstGeom>
+        </p:spPr>
+      </p:pic>
     </p:spTree>
     <p:extLst>
       <p:ext uri="{BB962C8B-B14F-4D97-AF65-F5344CB8AC3E}">
@@ -17502,7 +17944,7 @@
         <p:cNvPr id="1" name="">
           <a:extLst>
             <a:ext uri="{FF2B5EF4-FFF2-40B4-BE49-F238E27FC236}">
-              <a16:creationId xmlns:a16="http://schemas.microsoft.com/office/drawing/2014/main" id="{2C1C4B36-9B00-D17D-3D11-D3EC6B41A54E}"/>
+              <a16:creationId xmlns:a16="http://schemas.microsoft.com/office/drawing/2014/main" id="{0DC5A1FF-FF7B-BEF4-D8B2-D0C19A24F995}"/>
             </a:ext>
           </a:extLst>
         </p:cNvPr>
@@ -17522,7 +17964,7 @@
           <p:cNvPr id="3" name="Date Placeholder 2">
             <a:extLst>
               <a:ext uri="{FF2B5EF4-FFF2-40B4-BE49-F238E27FC236}">
-                <a16:creationId xmlns:a16="http://schemas.microsoft.com/office/drawing/2014/main" id="{D3A3FC5D-38A7-6106-D99B-E377EAAB508F}"/>
+                <a16:creationId xmlns:a16="http://schemas.microsoft.com/office/drawing/2014/main" id="{E1E5D09F-8CDC-0731-06F6-FC70DFFA5E5B}"/>
               </a:ext>
             </a:extLst>
           </p:cNvPr>
@@ -17551,7 +17993,7 @@
           <p:cNvPr id="4" name="Slide Number Placeholder 3">
             <a:extLst>
               <a:ext uri="{FF2B5EF4-FFF2-40B4-BE49-F238E27FC236}">
-                <a16:creationId xmlns:a16="http://schemas.microsoft.com/office/drawing/2014/main" id="{338E1671-51C7-C5B3-CDEE-1655EF8B3891}"/>
+                <a16:creationId xmlns:a16="http://schemas.microsoft.com/office/drawing/2014/main" id="{BEBA48E9-CBB9-DF3A-9864-3BAEBE7094B3}"/>
               </a:ext>
             </a:extLst>
           </p:cNvPr>
@@ -17580,7 +18022,7 @@
           <p:cNvPr id="7" name="TextBox 6">
             <a:extLst>
               <a:ext uri="{FF2B5EF4-FFF2-40B4-BE49-F238E27FC236}">
-                <a16:creationId xmlns:a16="http://schemas.microsoft.com/office/drawing/2014/main" id="{84000C52-9685-6BBB-2FEA-B906EDF58E0B}"/>
+                <a16:creationId xmlns:a16="http://schemas.microsoft.com/office/drawing/2014/main" id="{28A81B7A-D410-F8B4-FC4F-BF9B60C0F0FE}"/>
               </a:ext>
             </a:extLst>
           </p:cNvPr>
@@ -17618,7 +18060,7 @@
           <p:cNvPr id="6" name="Title 1">
             <a:extLst>
               <a:ext uri="{FF2B5EF4-FFF2-40B4-BE49-F238E27FC236}">
-                <a16:creationId xmlns:a16="http://schemas.microsoft.com/office/drawing/2014/main" id="{C748431A-A4A5-6CFA-9D41-04577CB28023}"/>
+                <a16:creationId xmlns:a16="http://schemas.microsoft.com/office/drawing/2014/main" id="{13BD4924-F8F2-2086-3EC8-DBE3D7AB1F3F}"/>
               </a:ext>
             </a:extLst>
           </p:cNvPr>
@@ -17631,7 +18073,7 @@
         </p:nvSpPr>
         <p:spPr>
           <a:xfrm>
-            <a:off x="211337" y="869738"/>
+            <a:off x="13601" y="785017"/>
             <a:ext cx="2939186" cy="2096814"/>
           </a:xfrm>
         </p:spPr>
@@ -17711,7 +18153,7 @@
           <p:cNvPr id="8" name="TextBox 7">
             <a:extLst>
               <a:ext uri="{FF2B5EF4-FFF2-40B4-BE49-F238E27FC236}">
-                <a16:creationId xmlns:a16="http://schemas.microsoft.com/office/drawing/2014/main" id="{50DC1195-0309-3E49-0AFD-EF57C13F15EA}"/>
+                <a16:creationId xmlns:a16="http://schemas.microsoft.com/office/drawing/2014/main" id="{612520B3-5AC1-1DE5-2355-E7C0A3867F07}"/>
               </a:ext>
             </a:extLst>
           </p:cNvPr>
@@ -17749,7 +18191,7 @@
           <p:cNvPr id="9" name="Title 1">
             <a:extLst>
               <a:ext uri="{FF2B5EF4-FFF2-40B4-BE49-F238E27FC236}">
-                <a16:creationId xmlns:a16="http://schemas.microsoft.com/office/drawing/2014/main" id="{123AFBDA-99A7-7B72-CF40-905E85DD1D51}"/>
+                <a16:creationId xmlns:a16="http://schemas.microsoft.com/office/drawing/2014/main" id="{EE7103D4-D9EA-E11C-6679-453CBF536828}"/>
               </a:ext>
             </a:extLst>
           </p:cNvPr>
@@ -17760,8 +18202,8 @@
         </p:nvSpPr>
         <p:spPr>
           <a:xfrm>
-            <a:off x="6385330" y="222569"/>
-            <a:ext cx="4230023" cy="486227"/>
+            <a:off x="8806587" y="149879"/>
+            <a:ext cx="2580554" cy="486227"/>
           </a:xfrm>
           <a:prstGeom prst="rect">
             <a:avLst/>
@@ -17799,7 +18241,7 @@
                 <a:latin typeface="Arial"/>
                 <a:cs typeface="Arial"/>
               </a:rPr>
-              <a:t>      </a:t>
+              <a:t>  </a:t>
             </a:r>
             <a:r>
               <a:rPr lang="en-US" sz="2100" dirty="0">
@@ -17820,7 +18262,7 @@
           <p:cNvPr id="2" name="Picture 1">
             <a:extLst>
               <a:ext uri="{FF2B5EF4-FFF2-40B4-BE49-F238E27FC236}">
-                <a16:creationId xmlns:a16="http://schemas.microsoft.com/office/drawing/2014/main" id="{C44D6088-A9CF-9A2E-DA70-0448707536A2}"/>
+                <a16:creationId xmlns:a16="http://schemas.microsoft.com/office/drawing/2014/main" id="{F3332FFE-59ED-89A9-F8C5-29B937B2A6B3}"/>
               </a:ext>
             </a:extLst>
           </p:cNvPr>
@@ -17837,8 +18279,38 @@
         </p:blipFill>
         <p:spPr>
           <a:xfrm>
-            <a:off x="3770153" y="1627786"/>
-            <a:ext cx="7772400" cy="4424548"/>
+            <a:off x="2608976" y="1593956"/>
+            <a:ext cx="9396853" cy="5114165"/>
+          </a:xfrm>
+          <a:prstGeom prst="rect">
+            <a:avLst/>
+          </a:prstGeom>
+        </p:spPr>
+      </p:pic>
+      <p:pic>
+        <p:nvPicPr>
+          <p:cNvPr id="10" name="Picture 9">
+            <a:extLst>
+              <a:ext uri="{FF2B5EF4-FFF2-40B4-BE49-F238E27FC236}">
+                <a16:creationId xmlns:a16="http://schemas.microsoft.com/office/drawing/2014/main" id="{87B4614C-BB72-6299-5650-6B358752F183}"/>
+              </a:ext>
+            </a:extLst>
+          </p:cNvPr>
+          <p:cNvPicPr>
+            <a:picLocks noChangeAspect="1"/>
+          </p:cNvPicPr>
+          <p:nvPr/>
+        </p:nvPicPr>
+        <p:blipFill>
+          <a:blip r:embed="rId4"/>
+          <a:stretch>
+            <a:fillRect/>
+          </a:stretch>
+        </p:blipFill>
+        <p:spPr>
+          <a:xfrm>
+            <a:off x="4040907" y="870142"/>
+            <a:ext cx="6532989" cy="574903"/>
           </a:xfrm>
           <a:prstGeom prst="rect">
             <a:avLst/>
@@ -17848,7 +18320,7 @@
     </p:spTree>
     <p:extLst>
       <p:ext uri="{BB962C8B-B14F-4D97-AF65-F5344CB8AC3E}">
-        <p14:creationId xmlns:p14="http://schemas.microsoft.com/office/powerpoint/2010/main" val="1625813769"/>
+        <p14:creationId xmlns:p14="http://schemas.microsoft.com/office/powerpoint/2010/main" val="1342684157"/>
       </p:ext>
     </p:extLst>
   </p:cSld>

--- a/week6/ColeCh5_Ouspenskaia.pptx
+++ b/week6/ColeCh5_Ouspenskaia.pptx
@@ -5,7 +5,7 @@
     <p:sldMasterId id="2147483672" r:id="rId1"/>
   </p:sldMasterIdLst>
   <p:notesMasterIdLst>
-    <p:notesMasterId r:id="rId16"/>
+    <p:notesMasterId r:id="rId15"/>
   </p:notesMasterIdLst>
   <p:sldIdLst>
     <p:sldId id="256" r:id="rId2"/>
@@ -15,13 +15,12 @@
     <p:sldId id="264" r:id="rId6"/>
     <p:sldId id="266" r:id="rId7"/>
     <p:sldId id="259" r:id="rId8"/>
-    <p:sldId id="267" r:id="rId9"/>
-    <p:sldId id="275" r:id="rId10"/>
-    <p:sldId id="268" r:id="rId11"/>
-    <p:sldId id="269" r:id="rId12"/>
-    <p:sldId id="272" r:id="rId13"/>
-    <p:sldId id="270" r:id="rId14"/>
-    <p:sldId id="274" r:id="rId15"/>
+    <p:sldId id="275" r:id="rId9"/>
+    <p:sldId id="268" r:id="rId10"/>
+    <p:sldId id="269" r:id="rId11"/>
+    <p:sldId id="272" r:id="rId12"/>
+    <p:sldId id="270" r:id="rId13"/>
+    <p:sldId id="274" r:id="rId14"/>
   </p:sldIdLst>
   <p:sldSz cx="12192000" cy="6858000"/>
   <p:notesSz cx="6858000" cy="9144000"/>
@@ -584,114 +583,6 @@
         <p:cNvPr id="1" name="">
           <a:extLst>
             <a:ext uri="{FF2B5EF4-FFF2-40B4-BE49-F238E27FC236}">
-              <a16:creationId xmlns:a16="http://schemas.microsoft.com/office/drawing/2014/main" id="{1E043B1A-03B6-A2D3-2D89-F81A2C92570A}"/>
-            </a:ext>
-          </a:extLst>
-        </p:cNvPr>
-        <p:cNvGrpSpPr/>
-        <p:nvPr/>
-      </p:nvGrpSpPr>
-      <p:grpSpPr>
-        <a:xfrm>
-          <a:off x="0" y="0"/>
-          <a:ext cx="0" cy="0"/>
-          <a:chOff x="0" y="0"/>
-          <a:chExt cx="0" cy="0"/>
-        </a:xfrm>
-      </p:grpSpPr>
-      <p:sp>
-        <p:nvSpPr>
-          <p:cNvPr id="2" name="Slide Image Placeholder 1">
-            <a:extLst>
-              <a:ext uri="{FF2B5EF4-FFF2-40B4-BE49-F238E27FC236}">
-                <a16:creationId xmlns:a16="http://schemas.microsoft.com/office/drawing/2014/main" id="{4CD6B872-3563-62F6-F7BF-A923376A61A5}"/>
-              </a:ext>
-            </a:extLst>
-          </p:cNvPr>
-          <p:cNvSpPr>
-            <a:spLocks noGrp="1" noRot="1" noChangeAspect="1"/>
-          </p:cNvSpPr>
-          <p:nvPr>
-            <p:ph type="sldImg"/>
-          </p:nvPr>
-        </p:nvSpPr>
-        <p:spPr/>
-      </p:sp>
-      <p:sp>
-        <p:nvSpPr>
-          <p:cNvPr id="3" name="Notes Placeholder 2">
-            <a:extLst>
-              <a:ext uri="{FF2B5EF4-FFF2-40B4-BE49-F238E27FC236}">
-                <a16:creationId xmlns:a16="http://schemas.microsoft.com/office/drawing/2014/main" id="{43974C5A-764F-7B6F-7E55-9F362F276371}"/>
-              </a:ext>
-            </a:extLst>
-          </p:cNvPr>
-          <p:cNvSpPr>
-            <a:spLocks noGrp="1"/>
-          </p:cNvSpPr>
-          <p:nvPr>
-            <p:ph type="body" idx="1"/>
-          </p:nvPr>
-        </p:nvSpPr>
-        <p:spPr/>
-        <p:txBody>
-          <a:bodyPr/>
-          <a:lstStyle/>
-          <a:p>
-            <a:endParaRPr lang="en-US" dirty="0"/>
-          </a:p>
-        </p:txBody>
-      </p:sp>
-      <p:sp>
-        <p:nvSpPr>
-          <p:cNvPr id="4" name="Slide Number Placeholder 3">
-            <a:extLst>
-              <a:ext uri="{FF2B5EF4-FFF2-40B4-BE49-F238E27FC236}">
-                <a16:creationId xmlns:a16="http://schemas.microsoft.com/office/drawing/2014/main" id="{D05C9EC4-4FC9-698C-EF48-9986483AD596}"/>
-              </a:ext>
-            </a:extLst>
-          </p:cNvPr>
-          <p:cNvSpPr>
-            <a:spLocks noGrp="1"/>
-          </p:cNvSpPr>
-          <p:nvPr>
-            <p:ph type="sldNum" sz="quarter" idx="5"/>
-          </p:nvPr>
-        </p:nvSpPr>
-        <p:spPr/>
-        <p:txBody>
-          <a:bodyPr/>
-          <a:lstStyle/>
-          <a:p>
-            <a:fld id="{32D02AEB-D71A-B841-8974-BDC9320FD368}" type="slidenum">
-              <a:rPr lang="en-US" smtClean="0"/>
-              <a:t>8</a:t>
-            </a:fld>
-            <a:endParaRPr lang="en-US"/>
-          </a:p>
-        </p:txBody>
-      </p:sp>
-    </p:spTree>
-    <p:extLst>
-      <p:ext uri="{BB962C8B-B14F-4D97-AF65-F5344CB8AC3E}">
-        <p14:creationId xmlns:p14="http://schemas.microsoft.com/office/powerpoint/2010/main" val="3784858287"/>
-      </p:ext>
-    </p:extLst>
-  </p:cSld>
-  <p:clrMapOvr>
-    <a:masterClrMapping/>
-  </p:clrMapOvr>
-</p:notes>
-</file>
-
-<file path=ppt/notesSlides/notesSlide3.xml><?xml version="1.0" encoding="utf-8"?>
-<p:notes xmlns:a="http://schemas.openxmlformats.org/drawingml/2006/main" xmlns:r="http://schemas.openxmlformats.org/officeDocument/2006/relationships" xmlns:p="http://schemas.openxmlformats.org/presentationml/2006/main">
-  <p:cSld>
-    <p:spTree>
-      <p:nvGrpSpPr>
-        <p:cNvPr id="1" name="">
-          <a:extLst>
-            <a:ext uri="{FF2B5EF4-FFF2-40B4-BE49-F238E27FC236}">
               <a16:creationId xmlns:a16="http://schemas.microsoft.com/office/drawing/2014/main" id="{6B441F78-BDA6-D48C-9A0A-C1EA7667A963}"/>
             </a:ext>
           </a:extLst>
@@ -773,7 +664,7 @@
           <a:p>
             <a:fld id="{32D02AEB-D71A-B841-8974-BDC9320FD368}" type="slidenum">
               <a:rPr lang="en-US" smtClean="0"/>
-              <a:t>9</a:t>
+              <a:t>8</a:t>
             </a:fld>
             <a:endParaRPr lang="en-US"/>
           </a:p>
@@ -792,7 +683,7 @@
 </p:notes>
 </file>
 
-<file path=ppt/notesSlides/notesSlide4.xml><?xml version="1.0" encoding="utf-8"?>
+<file path=ppt/notesSlides/notesSlide3.xml><?xml version="1.0" encoding="utf-8"?>
 <p:notes xmlns:a="http://schemas.openxmlformats.org/drawingml/2006/main" xmlns:r="http://schemas.openxmlformats.org/officeDocument/2006/relationships" xmlns:p="http://schemas.openxmlformats.org/presentationml/2006/main">
   <p:cSld>
     <p:spTree>
@@ -881,7 +772,7 @@
           <a:p>
             <a:fld id="{32D02AEB-D71A-B841-8974-BDC9320FD368}" type="slidenum">
               <a:rPr lang="en-US" smtClean="0"/>
-              <a:t>10</a:t>
+              <a:t>9</a:t>
             </a:fld>
             <a:endParaRPr lang="en-US"/>
           </a:p>
@@ -900,7 +791,7 @@
 </p:notes>
 </file>
 
-<file path=ppt/notesSlides/notesSlide5.xml><?xml version="1.0" encoding="utf-8"?>
+<file path=ppt/notesSlides/notesSlide4.xml><?xml version="1.0" encoding="utf-8"?>
 <p:notes xmlns:a="http://schemas.openxmlformats.org/drawingml/2006/main" xmlns:r="http://schemas.openxmlformats.org/officeDocument/2006/relationships" xmlns:p="http://schemas.openxmlformats.org/presentationml/2006/main">
   <p:cSld>
     <p:spTree>
@@ -989,7 +880,7 @@
           <a:p>
             <a:fld id="{32D02AEB-D71A-B841-8974-BDC9320FD368}" type="slidenum">
               <a:rPr lang="en-US" smtClean="0"/>
-              <a:t>11</a:t>
+              <a:t>10</a:t>
             </a:fld>
             <a:endParaRPr lang="en-US"/>
           </a:p>
@@ -1008,7 +899,7 @@
 </p:notes>
 </file>
 
-<file path=ppt/notesSlides/notesSlide6.xml><?xml version="1.0" encoding="utf-8"?>
+<file path=ppt/notesSlides/notesSlide5.xml><?xml version="1.0" encoding="utf-8"?>
 <p:notes xmlns:a="http://schemas.openxmlformats.org/drawingml/2006/main" xmlns:r="http://schemas.openxmlformats.org/officeDocument/2006/relationships" xmlns:p="http://schemas.openxmlformats.org/presentationml/2006/main">
   <p:cSld>
     <p:spTree>
@@ -1136,7 +1027,7 @@
           <a:p>
             <a:fld id="{32D02AEB-D71A-B841-8974-BDC9320FD368}" type="slidenum">
               <a:rPr lang="en-US" smtClean="0"/>
-              <a:t>12</a:t>
+              <a:t>11</a:t>
             </a:fld>
             <a:endParaRPr lang="en-US"/>
           </a:p>
@@ -1155,7 +1046,7 @@
 </p:notes>
 </file>
 
-<file path=ppt/notesSlides/notesSlide7.xml><?xml version="1.0" encoding="utf-8"?>
+<file path=ppt/notesSlides/notesSlide6.xml><?xml version="1.0" encoding="utf-8"?>
 <p:notes xmlns:a="http://schemas.openxmlformats.org/drawingml/2006/main" xmlns:r="http://schemas.openxmlformats.org/officeDocument/2006/relationships" xmlns:p="http://schemas.openxmlformats.org/presentationml/2006/main">
   <p:cSld>
     <p:spTree>
@@ -1252,7 +1143,7 @@
           <a:p>
             <a:fld id="{32D02AEB-D71A-B841-8974-BDC9320FD368}" type="slidenum">
               <a:rPr lang="en-US" smtClean="0"/>
-              <a:t>13</a:t>
+              <a:t>12</a:t>
             </a:fld>
             <a:endParaRPr lang="en-US"/>
           </a:p>
@@ -1271,7 +1162,7 @@
 </p:notes>
 </file>
 
-<file path=ppt/notesSlides/notesSlide8.xml><?xml version="1.0" encoding="utf-8"?>
+<file path=ppt/notesSlides/notesSlide7.xml><?xml version="1.0" encoding="utf-8"?>
 <p:notes xmlns:a="http://schemas.openxmlformats.org/drawingml/2006/main" xmlns:r="http://schemas.openxmlformats.org/officeDocument/2006/relationships" xmlns:p="http://schemas.openxmlformats.org/presentationml/2006/main">
   <p:cSld>
     <p:spTree>
@@ -1483,7 +1374,7 @@
           <a:p>
             <a:fld id="{32D02AEB-D71A-B841-8974-BDC9320FD368}" type="slidenum">
               <a:rPr lang="en-US" smtClean="0"/>
-              <a:t>14</a:t>
+              <a:t>13</a:t>
             </a:fld>
             <a:endParaRPr lang="en-US"/>
           </a:p>
@@ -13131,7 +13022,7 @@
         <p:cNvPr id="1" name="">
           <a:extLst>
             <a:ext uri="{FF2B5EF4-FFF2-40B4-BE49-F238E27FC236}">
-              <a16:creationId xmlns:a16="http://schemas.microsoft.com/office/drawing/2014/main" id="{2C1C4B36-9B00-D17D-3D11-D3EC6B41A54E}"/>
+              <a16:creationId xmlns:a16="http://schemas.microsoft.com/office/drawing/2014/main" id="{7839A4ED-4C1F-7643-12B7-9B8DB8BDF981}"/>
             </a:ext>
           </a:extLst>
         </p:cNvPr>
@@ -13151,7 +13042,7 @@
           <p:cNvPr id="3" name="Date Placeholder 2">
             <a:extLst>
               <a:ext uri="{FF2B5EF4-FFF2-40B4-BE49-F238E27FC236}">
-                <a16:creationId xmlns:a16="http://schemas.microsoft.com/office/drawing/2014/main" id="{D3A3FC5D-38A7-6106-D99B-E377EAAB508F}"/>
+                <a16:creationId xmlns:a16="http://schemas.microsoft.com/office/drawing/2014/main" id="{DCF562BA-0B60-4860-2684-8B711C71EC06}"/>
               </a:ext>
             </a:extLst>
           </p:cNvPr>
@@ -13180,7 +13071,7 @@
           <p:cNvPr id="4" name="Slide Number Placeholder 3">
             <a:extLst>
               <a:ext uri="{FF2B5EF4-FFF2-40B4-BE49-F238E27FC236}">
-                <a16:creationId xmlns:a16="http://schemas.microsoft.com/office/drawing/2014/main" id="{338E1671-51C7-C5B3-CDEE-1655EF8B3891}"/>
+                <a16:creationId xmlns:a16="http://schemas.microsoft.com/office/drawing/2014/main" id="{B9B36011-6662-B612-B011-9B396D7C14AB}"/>
               </a:ext>
             </a:extLst>
           </p:cNvPr>
@@ -13209,7 +13100,7 @@
           <p:cNvPr id="7" name="TextBox 6">
             <a:extLst>
               <a:ext uri="{FF2B5EF4-FFF2-40B4-BE49-F238E27FC236}">
-                <a16:creationId xmlns:a16="http://schemas.microsoft.com/office/drawing/2014/main" id="{84000C52-9685-6BBB-2FEA-B906EDF58E0B}"/>
+                <a16:creationId xmlns:a16="http://schemas.microsoft.com/office/drawing/2014/main" id="{05294F00-ADDD-5C6D-45F8-0469C3B88098}"/>
               </a:ext>
             </a:extLst>
           </p:cNvPr>
@@ -13247,7 +13138,7 @@
           <p:cNvPr id="6" name="Title 1">
             <a:extLst>
               <a:ext uri="{FF2B5EF4-FFF2-40B4-BE49-F238E27FC236}">
-                <a16:creationId xmlns:a16="http://schemas.microsoft.com/office/drawing/2014/main" id="{C748431A-A4A5-6CFA-9D41-04577CB28023}"/>
+                <a16:creationId xmlns:a16="http://schemas.microsoft.com/office/drawing/2014/main" id="{E57DCEE2-B8D7-C7AE-09AD-5853035671A8}"/>
               </a:ext>
             </a:extLst>
           </p:cNvPr>
@@ -13340,7 +13231,7 @@
           <p:cNvPr id="8" name="TextBox 7">
             <a:extLst>
               <a:ext uri="{FF2B5EF4-FFF2-40B4-BE49-F238E27FC236}">
-                <a16:creationId xmlns:a16="http://schemas.microsoft.com/office/drawing/2014/main" id="{50DC1195-0309-3E49-0AFD-EF57C13F15EA}"/>
+                <a16:creationId xmlns:a16="http://schemas.microsoft.com/office/drawing/2014/main" id="{E5808F31-8278-659D-B30B-9B5CB74D2755}"/>
               </a:ext>
             </a:extLst>
           </p:cNvPr>
@@ -13378,7 +13269,7 @@
           <p:cNvPr id="9" name="Title 1">
             <a:extLst>
               <a:ext uri="{FF2B5EF4-FFF2-40B4-BE49-F238E27FC236}">
-                <a16:creationId xmlns:a16="http://schemas.microsoft.com/office/drawing/2014/main" id="{123AFBDA-99A7-7B72-CF40-905E85DD1D51}"/>
+                <a16:creationId xmlns:a16="http://schemas.microsoft.com/office/drawing/2014/main" id="{D704C17B-EDA2-E890-E2B4-CD1589366249}"/>
               </a:ext>
             </a:extLst>
           </p:cNvPr>
@@ -13449,7 +13340,7 @@
           <p:cNvPr id="2" name="Picture 1">
             <a:extLst>
               <a:ext uri="{FF2B5EF4-FFF2-40B4-BE49-F238E27FC236}">
-                <a16:creationId xmlns:a16="http://schemas.microsoft.com/office/drawing/2014/main" id="{C44D6088-A9CF-9A2E-DA70-0448707536A2}"/>
+                <a16:creationId xmlns:a16="http://schemas.microsoft.com/office/drawing/2014/main" id="{8CBC268E-BE73-6CB7-D0B2-9CD3E766CB2A}"/>
               </a:ext>
             </a:extLst>
           </p:cNvPr>
@@ -13466,8 +13357,8 @@
         </p:blipFill>
         <p:spPr>
           <a:xfrm>
-            <a:off x="3770153" y="1627786"/>
-            <a:ext cx="7772400" cy="4424548"/>
+            <a:off x="3947679" y="933123"/>
+            <a:ext cx="7772400" cy="5654135"/>
           </a:xfrm>
           <a:prstGeom prst="rect">
             <a:avLst/>
@@ -13477,7 +13368,7 @@
     </p:spTree>
     <p:extLst>
       <p:ext uri="{BB962C8B-B14F-4D97-AF65-F5344CB8AC3E}">
-        <p14:creationId xmlns:p14="http://schemas.microsoft.com/office/powerpoint/2010/main" val="1625813769"/>
+        <p14:creationId xmlns:p14="http://schemas.microsoft.com/office/powerpoint/2010/main" val="2166973366"/>
       </p:ext>
     </p:extLst>
   </p:cSld>
@@ -13495,7 +13386,7 @@
         <p:cNvPr id="1" name="">
           <a:extLst>
             <a:ext uri="{FF2B5EF4-FFF2-40B4-BE49-F238E27FC236}">
-              <a16:creationId xmlns:a16="http://schemas.microsoft.com/office/drawing/2014/main" id="{7839A4ED-4C1F-7643-12B7-9B8DB8BDF981}"/>
+              <a16:creationId xmlns:a16="http://schemas.microsoft.com/office/drawing/2014/main" id="{DBBF9734-400F-F59B-CB0D-93B2123E1D0D}"/>
             </a:ext>
           </a:extLst>
         </p:cNvPr>
@@ -13515,7 +13406,7 @@
           <p:cNvPr id="3" name="Date Placeholder 2">
             <a:extLst>
               <a:ext uri="{FF2B5EF4-FFF2-40B4-BE49-F238E27FC236}">
-                <a16:creationId xmlns:a16="http://schemas.microsoft.com/office/drawing/2014/main" id="{DCF562BA-0B60-4860-2684-8B711C71EC06}"/>
+                <a16:creationId xmlns:a16="http://schemas.microsoft.com/office/drawing/2014/main" id="{CEE9E0CA-0041-FF9E-A57C-3743B47280B8}"/>
               </a:ext>
             </a:extLst>
           </p:cNvPr>
@@ -13544,7 +13435,7 @@
           <p:cNvPr id="4" name="Slide Number Placeholder 3">
             <a:extLst>
               <a:ext uri="{FF2B5EF4-FFF2-40B4-BE49-F238E27FC236}">
-                <a16:creationId xmlns:a16="http://schemas.microsoft.com/office/drawing/2014/main" id="{B9B36011-6662-B612-B011-9B396D7C14AB}"/>
+                <a16:creationId xmlns:a16="http://schemas.microsoft.com/office/drawing/2014/main" id="{CFDA39A5-6D4B-D3D4-575B-41692B367887}"/>
               </a:ext>
             </a:extLst>
           </p:cNvPr>
@@ -13570,10 +13461,116 @@
       </p:sp>
       <p:sp>
         <p:nvSpPr>
+          <p:cNvPr id="5" name="Content Placeholder 4">
+            <a:extLst>
+              <a:ext uri="{FF2B5EF4-FFF2-40B4-BE49-F238E27FC236}">
+                <a16:creationId xmlns:a16="http://schemas.microsoft.com/office/drawing/2014/main" id="{FD190920-C6D3-C32D-ECEF-11D140558E39}"/>
+              </a:ext>
+            </a:extLst>
+          </p:cNvPr>
+          <p:cNvSpPr>
+            <a:spLocks noGrp="1"/>
+          </p:cNvSpPr>
+          <p:nvPr>
+            <p:ph sz="quarter" idx="13"/>
+          </p:nvPr>
+        </p:nvSpPr>
+        <p:spPr>
+          <a:xfrm>
+            <a:off x="3506598" y="869738"/>
+            <a:ext cx="8164455" cy="5910044"/>
+          </a:xfrm>
+        </p:spPr>
+        <p:txBody>
+          <a:bodyPr>
+            <a:normAutofit/>
+          </a:bodyPr>
+          <a:lstStyle/>
+          <a:p>
+            <a:r>
+              <a:rPr lang="en-US" sz="2000"/>
+              <a:t>Make </a:t>
+            </a:r>
+            <a:r>
+              <a:rPr lang="en-US" sz="2000" dirty="0"/>
+              <a:t>it pretty</a:t>
+            </a:r>
+          </a:p>
+          <a:p>
+            <a:r>
+              <a:rPr lang="en-US" sz="2000" dirty="0"/>
+              <a:t>“Studies have shown that more aesthetic designs are not only      perceived as easier to use, but also more readily accepted and used over time, promote creative thinking and problem solving, and foster positive relationships, making people more tolerant of problems with designs.”</a:t>
+            </a:r>
+          </a:p>
+          <a:p>
+            <a:r>
+              <a:rPr lang="en-US" sz="2000" dirty="0"/>
+              <a:t>						— Cole Knaflic</a:t>
+            </a:r>
+          </a:p>
+          <a:p>
+            <a:r>
+              <a:rPr lang="en-US" sz="2000" dirty="0"/>
+              <a:t>     </a:t>
+            </a:r>
+          </a:p>
+          <a:p>
+            <a:pPr marL="342900" indent="-342900">
+              <a:buFont typeface="Arial" panose="020B0604020202020204" pitchFamily="34" charset="0"/>
+              <a:buChar char="•"/>
+            </a:pPr>
+            <a:r>
+              <a:rPr lang="en-US" sz="2000" dirty="0"/>
+              <a:t>Use color sparingly and strategically to highlight</a:t>
+            </a:r>
+          </a:p>
+          <a:p>
+            <a:pPr marL="342900" indent="-342900">
+              <a:buFont typeface="Arial" panose="020B0604020202020204" pitchFamily="34" charset="0"/>
+              <a:buChar char="•"/>
+            </a:pPr>
+            <a:r>
+              <a:rPr lang="en-US" sz="2000" dirty="0"/>
+              <a:t>Alignment</a:t>
+            </a:r>
+          </a:p>
+          <a:p>
+            <a:pPr marL="342900" indent="-342900">
+              <a:buFont typeface="Arial" panose="020B0604020202020204" pitchFamily="34" charset="0"/>
+              <a:buChar char="•"/>
+            </a:pPr>
+            <a:r>
+              <a:rPr lang="en-US" sz="2000" dirty="0"/>
+              <a:t>Leverage white space</a:t>
+            </a:r>
+          </a:p>
+          <a:p>
+            <a:endParaRPr lang="en-US" dirty="0"/>
+          </a:p>
+          <a:p>
+            <a:endParaRPr lang="en-US" sz="2000" dirty="0"/>
+          </a:p>
+          <a:p>
+            <a:endParaRPr lang="en-US" dirty="0"/>
+          </a:p>
+          <a:p>
+            <a:endParaRPr lang="en-US" dirty="0"/>
+          </a:p>
+          <a:p>
+            <a:pPr marL="285750" indent="-285750">
+              <a:buFont typeface="Arial" panose="020B0604020202020204" pitchFamily="34" charset="0"/>
+              <a:buChar char="•"/>
+            </a:pPr>
+            <a:endParaRPr lang="en-US" dirty="0"/>
+          </a:p>
+        </p:txBody>
+      </p:sp>
+      <p:sp>
+        <p:nvSpPr>
           <p:cNvPr id="7" name="TextBox 6">
             <a:extLst>
               <a:ext uri="{FF2B5EF4-FFF2-40B4-BE49-F238E27FC236}">
-                <a16:creationId xmlns:a16="http://schemas.microsoft.com/office/drawing/2014/main" id="{05294F00-ADDD-5C6D-45F8-0469C3B88098}"/>
+                <a16:creationId xmlns:a16="http://schemas.microsoft.com/office/drawing/2014/main" id="{BB0B4C4F-46F3-C2C4-7672-1A0A9CABD4E3}"/>
               </a:ext>
             </a:extLst>
           </p:cNvPr>
@@ -13611,7 +13608,7 @@
           <p:cNvPr id="6" name="Title 1">
             <a:extLst>
               <a:ext uri="{FF2B5EF4-FFF2-40B4-BE49-F238E27FC236}">
-                <a16:creationId xmlns:a16="http://schemas.microsoft.com/office/drawing/2014/main" id="{E57DCEE2-B8D7-C7AE-09AD-5853035671A8}"/>
+                <a16:creationId xmlns:a16="http://schemas.microsoft.com/office/drawing/2014/main" id="{A6B93749-4C29-EF74-A309-A4C43BEC1C5E}"/>
               </a:ext>
             </a:extLst>
           </p:cNvPr>
@@ -13635,26 +13632,26 @@
           <a:lstStyle/>
           <a:p>
             <a:r>
-              <a:rPr lang="en-US" sz="2000" dirty="0">
+              <a:rPr lang="en-US" sz="2200" dirty="0">
                 <a:latin typeface="Arial"/>
                 <a:cs typeface="Arial"/>
               </a:rPr>
               <a:t>Affordances</a:t>
             </a:r>
             <a:br>
-              <a:rPr lang="en-US" sz="2000" dirty="0">
+              <a:rPr lang="en-US" sz="2200" dirty="0">
                 <a:latin typeface="Arial"/>
                 <a:cs typeface="Arial"/>
               </a:rPr>
             </a:br>
             <a:br>
-              <a:rPr lang="en-US" sz="2000" dirty="0">
+              <a:rPr lang="en-US" sz="2200" dirty="0">
                 <a:latin typeface="Arial"/>
                 <a:cs typeface="Arial"/>
               </a:rPr>
             </a:br>
             <a:r>
-              <a:rPr lang="en-US" sz="4000" dirty="0">
+              <a:rPr lang="en-US" sz="2200" dirty="0">
                 <a:latin typeface="Arial"/>
                 <a:cs typeface="Arial"/>
               </a:rPr>
@@ -13670,7 +13667,7 @@
               <a:rPr lang="en-US" sz="2000" dirty="0"/>
             </a:br>
             <a:r>
-              <a:rPr lang="en-US" sz="2000" dirty="0">
+              <a:rPr lang="en-US" sz="4000" dirty="0">
                 <a:latin typeface="Arial"/>
                 <a:cs typeface="Arial"/>
               </a:rPr>
@@ -13686,7 +13683,7 @@
               <a:rPr lang="en-US" sz="2000" dirty="0"/>
             </a:br>
             <a:r>
-              <a:rPr lang="en-US" sz="2000" dirty="0">
+              <a:rPr lang="en-US" sz="2200" dirty="0">
                 <a:latin typeface="Arial"/>
                 <a:cs typeface="Arial"/>
               </a:rPr>
@@ -13704,7 +13701,7 @@
           <p:cNvPr id="8" name="TextBox 7">
             <a:extLst>
               <a:ext uri="{FF2B5EF4-FFF2-40B4-BE49-F238E27FC236}">
-                <a16:creationId xmlns:a16="http://schemas.microsoft.com/office/drawing/2014/main" id="{E5808F31-8278-659D-B30B-9B5CB74D2755}"/>
+                <a16:creationId xmlns:a16="http://schemas.microsoft.com/office/drawing/2014/main" id="{B84B63D6-6B6F-6998-54D5-B8E313115FC6}"/>
               </a:ext>
             </a:extLst>
           </p:cNvPr>
@@ -13742,7 +13739,7 @@
           <p:cNvPr id="9" name="Title 1">
             <a:extLst>
               <a:ext uri="{FF2B5EF4-FFF2-40B4-BE49-F238E27FC236}">
-                <a16:creationId xmlns:a16="http://schemas.microsoft.com/office/drawing/2014/main" id="{D704C17B-EDA2-E890-E2B4-CD1589366249}"/>
+                <a16:creationId xmlns:a16="http://schemas.microsoft.com/office/drawing/2014/main" id="{5F570E77-EC0E-7FF6-387C-B3183E795F8B}"/>
               </a:ext>
             </a:extLst>
           </p:cNvPr>
@@ -13795,6 +13792,16 @@
               <a:t>      </a:t>
             </a:r>
             <a:r>
+              <a:rPr lang="en-US" sz="1800" dirty="0">
+                <a:solidFill>
+                  <a:srgbClr val="F2F2F2"/>
+                </a:solidFill>
+                <a:latin typeface="Arial"/>
+                <a:cs typeface="Arial"/>
+              </a:rPr>
+              <a:t>Cole Chapter 5     </a:t>
+            </a:r>
+            <a:r>
               <a:rPr lang="en-US" sz="2100" dirty="0">
                 <a:solidFill>
                   <a:srgbClr val="F2F2F2"/>
@@ -13802,46 +13809,16 @@
                 <a:latin typeface="Arial"/>
                 <a:cs typeface="Arial"/>
               </a:rPr>
-              <a:t>Cole Chapter 5                      </a:t>
+              <a:t>                 </a:t>
             </a:r>
             <a:endParaRPr lang="en-US" sz="2100" dirty="0"/>
           </a:p>
         </p:txBody>
       </p:sp>
-      <p:pic>
-        <p:nvPicPr>
-          <p:cNvPr id="2" name="Picture 1">
-            <a:extLst>
-              <a:ext uri="{FF2B5EF4-FFF2-40B4-BE49-F238E27FC236}">
-                <a16:creationId xmlns:a16="http://schemas.microsoft.com/office/drawing/2014/main" id="{8CBC268E-BE73-6CB7-D0B2-9CD3E766CB2A}"/>
-              </a:ext>
-            </a:extLst>
-          </p:cNvPr>
-          <p:cNvPicPr>
-            <a:picLocks noChangeAspect="1"/>
-          </p:cNvPicPr>
-          <p:nvPr/>
-        </p:nvPicPr>
-        <p:blipFill>
-          <a:blip r:embed="rId3"/>
-          <a:stretch>
-            <a:fillRect/>
-          </a:stretch>
-        </p:blipFill>
-        <p:spPr>
-          <a:xfrm>
-            <a:off x="3947679" y="933123"/>
-            <a:ext cx="7772400" cy="5654135"/>
-          </a:xfrm>
-          <a:prstGeom prst="rect">
-            <a:avLst/>
-          </a:prstGeom>
-        </p:spPr>
-      </p:pic>
     </p:spTree>
     <p:extLst>
       <p:ext uri="{BB962C8B-B14F-4D97-AF65-F5344CB8AC3E}">
-        <p14:creationId xmlns:p14="http://schemas.microsoft.com/office/powerpoint/2010/main" val="2166973366"/>
+        <p14:creationId xmlns:p14="http://schemas.microsoft.com/office/powerpoint/2010/main" val="1471317156"/>
       </p:ext>
     </p:extLst>
   </p:cSld>
@@ -13859,7 +13836,7 @@
         <p:cNvPr id="1" name="">
           <a:extLst>
             <a:ext uri="{FF2B5EF4-FFF2-40B4-BE49-F238E27FC236}">
-              <a16:creationId xmlns:a16="http://schemas.microsoft.com/office/drawing/2014/main" id="{DBBF9734-400F-F59B-CB0D-93B2123E1D0D}"/>
+              <a16:creationId xmlns:a16="http://schemas.microsoft.com/office/drawing/2014/main" id="{1C08523D-829A-7AD0-EA7D-6EDC4721354C}"/>
             </a:ext>
           </a:extLst>
         </p:cNvPr>
@@ -13879,7 +13856,7 @@
           <p:cNvPr id="3" name="Date Placeholder 2">
             <a:extLst>
               <a:ext uri="{FF2B5EF4-FFF2-40B4-BE49-F238E27FC236}">
-                <a16:creationId xmlns:a16="http://schemas.microsoft.com/office/drawing/2014/main" id="{CEE9E0CA-0041-FF9E-A57C-3743B47280B8}"/>
+                <a16:creationId xmlns:a16="http://schemas.microsoft.com/office/drawing/2014/main" id="{190F7671-687F-281A-333E-0A5795A6ED46}"/>
               </a:ext>
             </a:extLst>
           </p:cNvPr>
@@ -13908,7 +13885,7 @@
           <p:cNvPr id="4" name="Slide Number Placeholder 3">
             <a:extLst>
               <a:ext uri="{FF2B5EF4-FFF2-40B4-BE49-F238E27FC236}">
-                <a16:creationId xmlns:a16="http://schemas.microsoft.com/office/drawing/2014/main" id="{CFDA39A5-6D4B-D3D4-575B-41692B367887}"/>
+                <a16:creationId xmlns:a16="http://schemas.microsoft.com/office/drawing/2014/main" id="{14307109-1A50-BF3E-56B5-088220BD8A68}"/>
               </a:ext>
             </a:extLst>
           </p:cNvPr>
@@ -13934,109 +13911,10 @@
       </p:sp>
       <p:sp>
         <p:nvSpPr>
-          <p:cNvPr id="5" name="Content Placeholder 4">
-            <a:extLst>
-              <a:ext uri="{FF2B5EF4-FFF2-40B4-BE49-F238E27FC236}">
-                <a16:creationId xmlns:a16="http://schemas.microsoft.com/office/drawing/2014/main" id="{FD190920-C6D3-C32D-ECEF-11D140558E39}"/>
-              </a:ext>
-            </a:extLst>
-          </p:cNvPr>
-          <p:cNvSpPr>
-            <a:spLocks noGrp="1"/>
-          </p:cNvSpPr>
-          <p:nvPr>
-            <p:ph sz="quarter" idx="13"/>
-          </p:nvPr>
-        </p:nvSpPr>
-        <p:spPr>
-          <a:xfrm>
-            <a:off x="4003164" y="869738"/>
-            <a:ext cx="7667889" cy="5910044"/>
-          </a:xfrm>
-        </p:spPr>
-        <p:txBody>
-          <a:bodyPr>
-            <a:normAutofit/>
-          </a:bodyPr>
-          <a:lstStyle/>
-          <a:p>
-            <a:r>
-              <a:rPr lang="en-US" sz="2000" dirty="0"/>
-              <a:t>Make it pretty</a:t>
-            </a:r>
-          </a:p>
-          <a:p>
-            <a:r>
-              <a:rPr lang="en-US" sz="2000" dirty="0"/>
-              <a:t>“Studies have shown that more aesthetic designs are not only perceived as easier to use, but also more readily accepted and used over time, promote creative thinking and problem solving, and foster positive relationships, making people more tolerant of problems with designs.”</a:t>
-            </a:r>
-          </a:p>
-          <a:p>
-            <a:r>
-              <a:rPr lang="en-US" sz="2000" dirty="0"/>
-              <a:t>						— Cole Knaflic</a:t>
-            </a:r>
-          </a:p>
-          <a:p>
-            <a:endParaRPr lang="en-US" sz="2000" dirty="0"/>
-          </a:p>
-          <a:p>
-            <a:pPr marL="342900" indent="-342900">
-              <a:buFont typeface="Arial" panose="020B0604020202020204" pitchFamily="34" charset="0"/>
-              <a:buChar char="•"/>
-            </a:pPr>
-            <a:r>
-              <a:rPr lang="en-US" sz="2000" dirty="0"/>
-              <a:t>Use color sparingly and strategically to highlight</a:t>
-            </a:r>
-          </a:p>
-          <a:p>
-            <a:pPr marL="342900" indent="-342900">
-              <a:buFont typeface="Arial" panose="020B0604020202020204" pitchFamily="34" charset="0"/>
-              <a:buChar char="•"/>
-            </a:pPr>
-            <a:r>
-              <a:rPr lang="en-US" sz="2000" dirty="0"/>
-              <a:t>Alignment</a:t>
-            </a:r>
-          </a:p>
-          <a:p>
-            <a:pPr marL="342900" indent="-342900">
-              <a:buFont typeface="Arial" panose="020B0604020202020204" pitchFamily="34" charset="0"/>
-              <a:buChar char="•"/>
-            </a:pPr>
-            <a:r>
-              <a:rPr lang="en-US" sz="2000" dirty="0"/>
-              <a:t>Leverage white space</a:t>
-            </a:r>
-          </a:p>
-          <a:p>
-            <a:endParaRPr lang="en-US" dirty="0"/>
-          </a:p>
-          <a:p>
-            <a:endParaRPr lang="en-US" sz="2000" dirty="0"/>
-          </a:p>
-          <a:p>
-            <a:endParaRPr lang="en-US" dirty="0"/>
-          </a:p>
-          <a:p>
-            <a:endParaRPr lang="en-US" dirty="0"/>
-          </a:p>
-          <a:p>
-            <a:pPr marL="285750" indent="-285750">
-              <a:buFont typeface="Arial" panose="020B0604020202020204" pitchFamily="34" charset="0"/>
-              <a:buChar char="•"/>
-            </a:pPr>
-            <a:endParaRPr lang="en-US" dirty="0"/>
-          </a:p>
-        </p:txBody>
-      </p:sp>
-      <p:sp>
-        <p:nvSpPr>
           <p:cNvPr id="7" name="TextBox 6">
             <a:extLst>
               <a:ext uri="{FF2B5EF4-FFF2-40B4-BE49-F238E27FC236}">
-                <a16:creationId xmlns:a16="http://schemas.microsoft.com/office/drawing/2014/main" id="{BB0B4C4F-46F3-C2C4-7672-1A0A9CABD4E3}"/>
+                <a16:creationId xmlns:a16="http://schemas.microsoft.com/office/drawing/2014/main" id="{72754AE0-F5E7-9203-C826-DD754ABB530C}"/>
               </a:ext>
             </a:extLst>
           </p:cNvPr>
@@ -14074,7 +13952,7 @@
           <p:cNvPr id="6" name="Title 1">
             <a:extLst>
               <a:ext uri="{FF2B5EF4-FFF2-40B4-BE49-F238E27FC236}">
-                <a16:creationId xmlns:a16="http://schemas.microsoft.com/office/drawing/2014/main" id="{A6B93749-4C29-EF74-A309-A4C43BEC1C5E}"/>
+                <a16:creationId xmlns:a16="http://schemas.microsoft.com/office/drawing/2014/main" id="{330C95C2-C628-EFDD-762D-8EFD41F79DE8}"/>
               </a:ext>
             </a:extLst>
           </p:cNvPr>
@@ -14087,8 +13965,8 @@
         </p:nvSpPr>
         <p:spPr>
           <a:xfrm>
-            <a:off x="211337" y="869738"/>
-            <a:ext cx="2939186" cy="2096814"/>
+            <a:off x="93892" y="770074"/>
+            <a:ext cx="2397638" cy="2096814"/>
           </a:xfrm>
         </p:spPr>
         <p:txBody>
@@ -14167,7 +14045,7 @@
           <p:cNvPr id="8" name="TextBox 7">
             <a:extLst>
               <a:ext uri="{FF2B5EF4-FFF2-40B4-BE49-F238E27FC236}">
-                <a16:creationId xmlns:a16="http://schemas.microsoft.com/office/drawing/2014/main" id="{B84B63D6-6B6F-6998-54D5-B8E313115FC6}"/>
+                <a16:creationId xmlns:a16="http://schemas.microsoft.com/office/drawing/2014/main" id="{6E48EE5D-A947-753C-4BBF-9FE5AAB12854}"/>
               </a:ext>
             </a:extLst>
           </p:cNvPr>
@@ -14205,7 +14083,7 @@
           <p:cNvPr id="9" name="Title 1">
             <a:extLst>
               <a:ext uri="{FF2B5EF4-FFF2-40B4-BE49-F238E27FC236}">
-                <a16:creationId xmlns:a16="http://schemas.microsoft.com/office/drawing/2014/main" id="{5F570E77-EC0E-7FF6-387C-B3183E795F8B}"/>
+                <a16:creationId xmlns:a16="http://schemas.microsoft.com/office/drawing/2014/main" id="{5BD37BBB-298E-6835-A29D-CEE7EC564FDB}"/>
               </a:ext>
             </a:extLst>
           </p:cNvPr>
@@ -14265,350 +14143,6 @@
                 <a:latin typeface="Arial"/>
                 <a:cs typeface="Arial"/>
               </a:rPr>
-              <a:t>Cole Chapter 5     </a:t>
-            </a:r>
-            <a:r>
-              <a:rPr lang="en-US" sz="2100" dirty="0">
-                <a:solidFill>
-                  <a:srgbClr val="F2F2F2"/>
-                </a:solidFill>
-                <a:latin typeface="Arial"/>
-                <a:cs typeface="Arial"/>
-              </a:rPr>
-              <a:t>                 </a:t>
-            </a:r>
-            <a:endParaRPr lang="en-US" sz="2100" dirty="0"/>
-          </a:p>
-        </p:txBody>
-      </p:sp>
-    </p:spTree>
-    <p:extLst>
-      <p:ext uri="{BB962C8B-B14F-4D97-AF65-F5344CB8AC3E}">
-        <p14:creationId xmlns:p14="http://schemas.microsoft.com/office/powerpoint/2010/main" val="1471317156"/>
-      </p:ext>
-    </p:extLst>
-  </p:cSld>
-  <p:clrMapOvr>
-    <a:masterClrMapping/>
-  </p:clrMapOvr>
-</p:sld>
-</file>
-
-<file path=ppt/slides/slide13.xml><?xml version="1.0" encoding="utf-8"?>
-<p:sld xmlns:a="http://schemas.openxmlformats.org/drawingml/2006/main" xmlns:r="http://schemas.openxmlformats.org/officeDocument/2006/relationships" xmlns:p="http://schemas.openxmlformats.org/presentationml/2006/main">
-  <p:cSld>
-    <p:spTree>
-      <p:nvGrpSpPr>
-        <p:cNvPr id="1" name="">
-          <a:extLst>
-            <a:ext uri="{FF2B5EF4-FFF2-40B4-BE49-F238E27FC236}">
-              <a16:creationId xmlns:a16="http://schemas.microsoft.com/office/drawing/2014/main" id="{1C08523D-829A-7AD0-EA7D-6EDC4721354C}"/>
-            </a:ext>
-          </a:extLst>
-        </p:cNvPr>
-        <p:cNvGrpSpPr/>
-        <p:nvPr/>
-      </p:nvGrpSpPr>
-      <p:grpSpPr>
-        <a:xfrm>
-          <a:off x="0" y="0"/>
-          <a:ext cx="0" cy="0"/>
-          <a:chOff x="0" y="0"/>
-          <a:chExt cx="0" cy="0"/>
-        </a:xfrm>
-      </p:grpSpPr>
-      <p:sp>
-        <p:nvSpPr>
-          <p:cNvPr id="3" name="Date Placeholder 2">
-            <a:extLst>
-              <a:ext uri="{FF2B5EF4-FFF2-40B4-BE49-F238E27FC236}">
-                <a16:creationId xmlns:a16="http://schemas.microsoft.com/office/drawing/2014/main" id="{190F7671-687F-281A-333E-0A5795A6ED46}"/>
-              </a:ext>
-            </a:extLst>
-          </p:cNvPr>
-          <p:cNvSpPr>
-            <a:spLocks noGrp="1"/>
-          </p:cNvSpPr>
-          <p:nvPr>
-            <p:ph type="dt" sz="half" idx="14"/>
-          </p:nvPr>
-        </p:nvSpPr>
-        <p:spPr/>
-        <p:txBody>
-          <a:bodyPr/>
-          <a:lstStyle/>
-          <a:p>
-            <a:fld id="{5EC926B4-4344-4B16-B7A4-2D405F7C8DB5}" type="datetime1">
-              <a:rPr/>
-              <a:t>10/7/26</a:t>
-            </a:fld>
-            <a:endParaRPr lang="en-US" dirty="0"/>
-          </a:p>
-        </p:txBody>
-      </p:sp>
-      <p:sp>
-        <p:nvSpPr>
-          <p:cNvPr id="4" name="Slide Number Placeholder 3">
-            <a:extLst>
-              <a:ext uri="{FF2B5EF4-FFF2-40B4-BE49-F238E27FC236}">
-                <a16:creationId xmlns:a16="http://schemas.microsoft.com/office/drawing/2014/main" id="{14307109-1A50-BF3E-56B5-088220BD8A68}"/>
-              </a:ext>
-            </a:extLst>
-          </p:cNvPr>
-          <p:cNvSpPr>
-            <a:spLocks noGrp="1"/>
-          </p:cNvSpPr>
-          <p:nvPr>
-            <p:ph type="sldNum" sz="quarter" idx="16"/>
-          </p:nvPr>
-        </p:nvSpPr>
-        <p:spPr/>
-        <p:txBody>
-          <a:bodyPr/>
-          <a:lstStyle/>
-          <a:p>
-            <a:fld id="{5E0677F5-4A8A-4BF1-96BE-3BAE8FBAFE2E}" type="slidenum">
-              <a:rPr lang="en-US" dirty="0"/>
-              <a:t>13</a:t>
-            </a:fld>
-            <a:endParaRPr lang="en-US"/>
-          </a:p>
-        </p:txBody>
-      </p:sp>
-      <p:sp>
-        <p:nvSpPr>
-          <p:cNvPr id="7" name="TextBox 6">
-            <a:extLst>
-              <a:ext uri="{FF2B5EF4-FFF2-40B4-BE49-F238E27FC236}">
-                <a16:creationId xmlns:a16="http://schemas.microsoft.com/office/drawing/2014/main" id="{72754AE0-F5E7-9203-C826-DD754ABB530C}"/>
-              </a:ext>
-            </a:extLst>
-          </p:cNvPr>
-          <p:cNvSpPr txBox="1"/>
-          <p:nvPr/>
-        </p:nvSpPr>
-        <p:spPr>
-          <a:xfrm>
-            <a:off x="11720079" y="270742"/>
-            <a:ext cx="357908" cy="246221"/>
-          </a:xfrm>
-          <a:prstGeom prst="rect">
-            <a:avLst/>
-          </a:prstGeom>
-          <a:noFill/>
-        </p:spPr>
-        <p:txBody>
-          <a:bodyPr rot="0" spcFirstLastPara="0" vertOverflow="overflow" horzOverflow="overflow" vert="horz" wrap="square" lIns="91440" tIns="45720" rIns="91440" bIns="45720" numCol="1" spcCol="0" rtlCol="0" fromWordArt="0" anchor="t" anchorCtr="0" forceAA="0" compatLnSpc="1">
-            <a:prstTxWarp prst="textNoShape">
-              <a:avLst/>
-            </a:prstTxWarp>
-            <a:spAutoFit/>
-          </a:bodyPr>
-          <a:lstStyle/>
-          <a:p>
-            <a:r>
-              <a:rPr lang="en-US" sz="1000" dirty="0"/>
-              <a:t>/13</a:t>
-            </a:r>
-          </a:p>
-        </p:txBody>
-      </p:sp>
-      <p:sp>
-        <p:nvSpPr>
-          <p:cNvPr id="6" name="Title 1">
-            <a:extLst>
-              <a:ext uri="{FF2B5EF4-FFF2-40B4-BE49-F238E27FC236}">
-                <a16:creationId xmlns:a16="http://schemas.microsoft.com/office/drawing/2014/main" id="{330C95C2-C628-EFDD-762D-8EFD41F79DE8}"/>
-              </a:ext>
-            </a:extLst>
-          </p:cNvPr>
-          <p:cNvSpPr>
-            <a:spLocks noGrp="1"/>
-          </p:cNvSpPr>
-          <p:nvPr>
-            <p:ph type="title"/>
-          </p:nvPr>
-        </p:nvSpPr>
-        <p:spPr>
-          <a:xfrm>
-            <a:off x="93892" y="770074"/>
-            <a:ext cx="2397638" cy="2096814"/>
-          </a:xfrm>
-        </p:spPr>
-        <p:txBody>
-          <a:bodyPr>
-            <a:normAutofit fontScale="90000"/>
-          </a:bodyPr>
-          <a:lstStyle/>
-          <a:p>
-            <a:r>
-              <a:rPr lang="en-US" sz="2200" dirty="0">
-                <a:latin typeface="Arial"/>
-                <a:cs typeface="Arial"/>
-              </a:rPr>
-              <a:t>Affordances</a:t>
-            </a:r>
-            <a:br>
-              <a:rPr lang="en-US" sz="2200" dirty="0">
-                <a:latin typeface="Arial"/>
-                <a:cs typeface="Arial"/>
-              </a:rPr>
-            </a:br>
-            <a:br>
-              <a:rPr lang="en-US" sz="2200" dirty="0">
-                <a:latin typeface="Arial"/>
-                <a:cs typeface="Arial"/>
-              </a:rPr>
-            </a:br>
-            <a:r>
-              <a:rPr lang="en-US" sz="2200" dirty="0">
-                <a:latin typeface="Arial"/>
-                <a:cs typeface="Arial"/>
-              </a:rPr>
-              <a:t>Accessibility</a:t>
-            </a:r>
-            <a:br>
-              <a:rPr lang="en-US" sz="2000" dirty="0">
-                <a:latin typeface="Arial"/>
-                <a:cs typeface="Arial"/>
-              </a:rPr>
-            </a:br>
-            <a:br>
-              <a:rPr lang="en-US" sz="2000" dirty="0"/>
-            </a:br>
-            <a:r>
-              <a:rPr lang="en-US" sz="4000" dirty="0">
-                <a:latin typeface="Arial"/>
-                <a:cs typeface="Arial"/>
-              </a:rPr>
-              <a:t>Aesthetics</a:t>
-            </a:r>
-            <a:br>
-              <a:rPr lang="en-US" sz="2000" dirty="0">
-                <a:latin typeface="Arial"/>
-                <a:cs typeface="Arial"/>
-              </a:rPr>
-            </a:br>
-            <a:br>
-              <a:rPr lang="en-US" sz="2000" dirty="0"/>
-            </a:br>
-            <a:r>
-              <a:rPr lang="en-US" sz="2200" dirty="0">
-                <a:latin typeface="Arial"/>
-                <a:cs typeface="Arial"/>
-              </a:rPr>
-              <a:t>Acceptance</a:t>
-            </a:r>
-            <a:br>
-              <a:rPr lang="en-US" dirty="0"/>
-            </a:br>
-            <a:endParaRPr lang="en-US" dirty="0"/>
-          </a:p>
-        </p:txBody>
-      </p:sp>
-      <p:sp>
-        <p:nvSpPr>
-          <p:cNvPr id="8" name="TextBox 7">
-            <a:extLst>
-              <a:ext uri="{FF2B5EF4-FFF2-40B4-BE49-F238E27FC236}">
-                <a16:creationId xmlns:a16="http://schemas.microsoft.com/office/drawing/2014/main" id="{6E48EE5D-A947-753C-4BBF-9FE5AAB12854}"/>
-              </a:ext>
-            </a:extLst>
-          </p:cNvPr>
-          <p:cNvSpPr txBox="1"/>
-          <p:nvPr/>
-        </p:nvSpPr>
-        <p:spPr>
-          <a:xfrm>
-            <a:off x="164756" y="15914"/>
-            <a:ext cx="1710444" cy="682273"/>
-          </a:xfrm>
-          <a:prstGeom prst="rect">
-            <a:avLst/>
-          </a:prstGeom>
-          <a:solidFill>
-            <a:schemeClr val="bg1"/>
-          </a:solidFill>
-        </p:spPr>
-        <p:txBody>
-          <a:bodyPr rot="0" spcFirstLastPara="0" vertOverflow="overflow" horzOverflow="overflow" vert="horz" wrap="square" lIns="91440" tIns="45720" rIns="91440" bIns="45720" numCol="1" spcCol="0" rtlCol="0" fromWordArt="0" anchor="t" anchorCtr="0" forceAA="0" compatLnSpc="1">
-            <a:prstTxWarp prst="textNoShape">
-              <a:avLst/>
-            </a:prstTxWarp>
-            <a:spAutoFit/>
-          </a:bodyPr>
-          <a:lstStyle/>
-          <a:p>
-            <a:pPr algn="l"/>
-            <a:endParaRPr lang="en-US"/>
-          </a:p>
-        </p:txBody>
-      </p:sp>
-      <p:sp>
-        <p:nvSpPr>
-          <p:cNvPr id="9" name="Title 1">
-            <a:extLst>
-              <a:ext uri="{FF2B5EF4-FFF2-40B4-BE49-F238E27FC236}">
-                <a16:creationId xmlns:a16="http://schemas.microsoft.com/office/drawing/2014/main" id="{5BD37BBB-298E-6835-A29D-CEE7EC564FDB}"/>
-              </a:ext>
-            </a:extLst>
-          </p:cNvPr>
-          <p:cNvSpPr txBox="1">
-            <a:spLocks/>
-          </p:cNvSpPr>
-          <p:nvPr/>
-        </p:nvSpPr>
-        <p:spPr>
-          <a:xfrm>
-            <a:off x="6385330" y="222569"/>
-            <a:ext cx="4230023" cy="486227"/>
-          </a:xfrm>
-          <a:prstGeom prst="rect">
-            <a:avLst/>
-          </a:prstGeom>
-        </p:spPr>
-        <p:txBody>
-          <a:bodyPr vert="horz" lIns="91440" tIns="45720" rIns="91440" bIns="45720" rtlCol="0" anchor="t">
-            <a:normAutofit fontScale="97500" lnSpcReduction="10000"/>
-          </a:bodyPr>
-          <a:lstStyle>
-            <a:lvl1pPr algn="l" defTabSz="914400" rtl="0" eaLnBrk="1" latinLnBrk="0" hangingPunct="1">
-              <a:lnSpc>
-                <a:spcPct val="85000"/>
-              </a:lnSpc>
-              <a:spcBef>
-                <a:spcPct val="0"/>
-              </a:spcBef>
-              <a:buNone/>
-              <a:defRPr lang="en-US" sz="2800" b="0" kern="1200" spc="0" baseline="0" dirty="0">
-                <a:solidFill>
-                  <a:schemeClr val="tx1"/>
-                </a:solidFill>
-                <a:latin typeface="+mj-lt"/>
-                <a:ea typeface="+mj-ea"/>
-                <a:cs typeface="+mj-cs"/>
-              </a:defRPr>
-            </a:lvl1pPr>
-          </a:lstStyle>
-          <a:p>
-            <a:r>
-              <a:rPr lang="en-US" sz="3200" dirty="0">
-                <a:solidFill>
-                  <a:srgbClr val="F2F2F2"/>
-                </a:solidFill>
-                <a:latin typeface="Arial"/>
-                <a:cs typeface="Arial"/>
-              </a:rPr>
-              <a:t>      </a:t>
-            </a:r>
-            <a:r>
-              <a:rPr lang="en-US" sz="1800" dirty="0">
-                <a:solidFill>
-                  <a:srgbClr val="F2F2F2"/>
-                </a:solidFill>
-                <a:latin typeface="Arial"/>
-                <a:cs typeface="Arial"/>
-              </a:rPr>
               <a:t>Cole Chapter 5                      </a:t>
             </a:r>
             <a:endParaRPr lang="en-US" sz="1800" dirty="0"/>
@@ -14688,7 +14222,7 @@
 </p:sld>
 </file>
 
-<file path=ppt/slides/slide14.xml><?xml version="1.0" encoding="utf-8"?>
+<file path=ppt/slides/slide13.xml><?xml version="1.0" encoding="utf-8"?>
 <p:sld xmlns:a="http://schemas.openxmlformats.org/drawingml/2006/main" xmlns:r="http://schemas.openxmlformats.org/officeDocument/2006/relationships" xmlns:p="http://schemas.openxmlformats.org/presentationml/2006/main">
   <p:cSld>
     <p:spTree>
@@ -14763,7 +14297,7 @@
           <a:p>
             <a:fld id="{5E0677F5-4A8A-4BF1-96BE-3BAE8FBAFE2E}" type="slidenum">
               <a:rPr lang="en-US" dirty="0"/>
-              <a:t>14</a:t>
+              <a:t>13</a:t>
             </a:fld>
             <a:endParaRPr lang="en-US"/>
           </a:p>
@@ -17580,7 +17114,7 @@
         <p:cNvPr id="1" name="">
           <a:extLst>
             <a:ext uri="{FF2B5EF4-FFF2-40B4-BE49-F238E27FC236}">
-              <a16:creationId xmlns:a16="http://schemas.microsoft.com/office/drawing/2014/main" id="{5A7C7AF1-D95E-D86E-D08F-A2722CBD6D90}"/>
+              <a16:creationId xmlns:a16="http://schemas.microsoft.com/office/drawing/2014/main" id="{0DC5A1FF-FF7B-BEF4-D8B2-D0C19A24F995}"/>
             </a:ext>
           </a:extLst>
         </p:cNvPr>
@@ -17600,7 +17134,7 @@
           <p:cNvPr id="3" name="Date Placeholder 2">
             <a:extLst>
               <a:ext uri="{FF2B5EF4-FFF2-40B4-BE49-F238E27FC236}">
-                <a16:creationId xmlns:a16="http://schemas.microsoft.com/office/drawing/2014/main" id="{D14A73B2-6902-E437-F21E-7F08B37DEF00}"/>
+                <a16:creationId xmlns:a16="http://schemas.microsoft.com/office/drawing/2014/main" id="{E1E5D09F-8CDC-0731-06F6-FC70DFFA5E5B}"/>
               </a:ext>
             </a:extLst>
           </p:cNvPr>
@@ -17629,7 +17163,7 @@
           <p:cNvPr id="4" name="Slide Number Placeholder 3">
             <a:extLst>
               <a:ext uri="{FF2B5EF4-FFF2-40B4-BE49-F238E27FC236}">
-                <a16:creationId xmlns:a16="http://schemas.microsoft.com/office/drawing/2014/main" id="{F18777D0-AEA0-3FA1-1389-83A5FF02E84D}"/>
+                <a16:creationId xmlns:a16="http://schemas.microsoft.com/office/drawing/2014/main" id="{BEBA48E9-CBB9-DF3A-9864-3BAEBE7094B3}"/>
               </a:ext>
             </a:extLst>
           </p:cNvPr>
@@ -17658,7 +17192,7 @@
           <p:cNvPr id="7" name="TextBox 6">
             <a:extLst>
               <a:ext uri="{FF2B5EF4-FFF2-40B4-BE49-F238E27FC236}">
-                <a16:creationId xmlns:a16="http://schemas.microsoft.com/office/drawing/2014/main" id="{6726AC10-643C-AA03-AFE2-6AF0597B6CB9}"/>
+                <a16:creationId xmlns:a16="http://schemas.microsoft.com/office/drawing/2014/main" id="{28A81B7A-D410-F8B4-FC4F-BF9B60C0F0FE}"/>
               </a:ext>
             </a:extLst>
           </p:cNvPr>
@@ -17696,7 +17230,7 @@
           <p:cNvPr id="6" name="Title 1">
             <a:extLst>
               <a:ext uri="{FF2B5EF4-FFF2-40B4-BE49-F238E27FC236}">
-                <a16:creationId xmlns:a16="http://schemas.microsoft.com/office/drawing/2014/main" id="{379727D7-BBA3-21E8-C8F3-442E25711F87}"/>
+                <a16:creationId xmlns:a16="http://schemas.microsoft.com/office/drawing/2014/main" id="{13BD4924-F8F2-2086-3EC8-DBE3D7AB1F3F}"/>
               </a:ext>
             </a:extLst>
           </p:cNvPr>
@@ -17709,7 +17243,7 @@
         </p:nvSpPr>
         <p:spPr>
           <a:xfrm>
-            <a:off x="211337" y="869738"/>
+            <a:off x="13601" y="785017"/>
             <a:ext cx="2939186" cy="2096814"/>
           </a:xfrm>
         </p:spPr>
@@ -17789,7 +17323,7 @@
           <p:cNvPr id="8" name="TextBox 7">
             <a:extLst>
               <a:ext uri="{FF2B5EF4-FFF2-40B4-BE49-F238E27FC236}">
-                <a16:creationId xmlns:a16="http://schemas.microsoft.com/office/drawing/2014/main" id="{3E180728-DD0E-63FD-567D-88647518269C}"/>
+                <a16:creationId xmlns:a16="http://schemas.microsoft.com/office/drawing/2014/main" id="{612520B3-5AC1-1DE5-2355-E7C0A3867F07}"/>
               </a:ext>
             </a:extLst>
           </p:cNvPr>
@@ -17827,7 +17361,7 @@
           <p:cNvPr id="9" name="Title 1">
             <a:extLst>
               <a:ext uri="{FF2B5EF4-FFF2-40B4-BE49-F238E27FC236}">
-                <a16:creationId xmlns:a16="http://schemas.microsoft.com/office/drawing/2014/main" id="{8D234A99-6D95-4AB6-816B-A926FFF07514}"/>
+                <a16:creationId xmlns:a16="http://schemas.microsoft.com/office/drawing/2014/main" id="{EE7103D4-D9EA-E11C-6679-453CBF536828}"/>
               </a:ext>
             </a:extLst>
           </p:cNvPr>
@@ -17838,8 +17372,8 @@
         </p:nvSpPr>
         <p:spPr>
           <a:xfrm>
-            <a:off x="6385330" y="222569"/>
-            <a:ext cx="4230023" cy="486227"/>
+            <a:off x="8806587" y="149879"/>
+            <a:ext cx="2580554" cy="486227"/>
           </a:xfrm>
           <a:prstGeom prst="rect">
             <a:avLst/>
@@ -17877,7 +17411,7 @@
                 <a:latin typeface="Arial"/>
                 <a:cs typeface="Arial"/>
               </a:rPr>
-              <a:t>      </a:t>
+              <a:t>  </a:t>
             </a:r>
             <a:r>
               <a:rPr lang="en-US" sz="2100" dirty="0">
@@ -17895,10 +17429,10 @@
       </p:sp>
       <p:pic>
         <p:nvPicPr>
-          <p:cNvPr id="11" name="Picture 10">
-            <a:extLst>
-              <a:ext uri="{FF2B5EF4-FFF2-40B4-BE49-F238E27FC236}">
-                <a16:creationId xmlns:a16="http://schemas.microsoft.com/office/drawing/2014/main" id="{58156050-CA3D-EAF1-8172-AC684AA1BB3B}"/>
+          <p:cNvPr id="2" name="Picture 1">
+            <a:extLst>
+              <a:ext uri="{FF2B5EF4-FFF2-40B4-BE49-F238E27FC236}">
+                <a16:creationId xmlns:a16="http://schemas.microsoft.com/office/drawing/2014/main" id="{F3332FFE-59ED-89A9-F8C5-29B937B2A6B3}"/>
               </a:ext>
             </a:extLst>
           </p:cNvPr>
@@ -17915,8 +17449,38 @@
         </p:blipFill>
         <p:spPr>
           <a:xfrm>
-            <a:off x="4403304" y="869738"/>
-            <a:ext cx="7316775" cy="5840456"/>
+            <a:off x="2608976" y="1593956"/>
+            <a:ext cx="9396853" cy="5114165"/>
+          </a:xfrm>
+          <a:prstGeom prst="rect">
+            <a:avLst/>
+          </a:prstGeom>
+        </p:spPr>
+      </p:pic>
+      <p:pic>
+        <p:nvPicPr>
+          <p:cNvPr id="10" name="Picture 9">
+            <a:extLst>
+              <a:ext uri="{FF2B5EF4-FFF2-40B4-BE49-F238E27FC236}">
+                <a16:creationId xmlns:a16="http://schemas.microsoft.com/office/drawing/2014/main" id="{87B4614C-BB72-6299-5650-6B358752F183}"/>
+              </a:ext>
+            </a:extLst>
+          </p:cNvPr>
+          <p:cNvPicPr>
+            <a:picLocks noChangeAspect="1"/>
+          </p:cNvPicPr>
+          <p:nvPr/>
+        </p:nvPicPr>
+        <p:blipFill>
+          <a:blip r:embed="rId4"/>
+          <a:stretch>
+            <a:fillRect/>
+          </a:stretch>
+        </p:blipFill>
+        <p:spPr>
+          <a:xfrm>
+            <a:off x="4040907" y="870142"/>
+            <a:ext cx="6532989" cy="574903"/>
           </a:xfrm>
           <a:prstGeom prst="rect">
             <a:avLst/>
@@ -17926,7 +17490,7 @@
     </p:spTree>
     <p:extLst>
       <p:ext uri="{BB962C8B-B14F-4D97-AF65-F5344CB8AC3E}">
-        <p14:creationId xmlns:p14="http://schemas.microsoft.com/office/powerpoint/2010/main" val="724956372"/>
+        <p14:creationId xmlns:p14="http://schemas.microsoft.com/office/powerpoint/2010/main" val="1342684157"/>
       </p:ext>
     </p:extLst>
   </p:cSld>
@@ -17944,7 +17508,7 @@
         <p:cNvPr id="1" name="">
           <a:extLst>
             <a:ext uri="{FF2B5EF4-FFF2-40B4-BE49-F238E27FC236}">
-              <a16:creationId xmlns:a16="http://schemas.microsoft.com/office/drawing/2014/main" id="{0DC5A1FF-FF7B-BEF4-D8B2-D0C19A24F995}"/>
+              <a16:creationId xmlns:a16="http://schemas.microsoft.com/office/drawing/2014/main" id="{2C1C4B36-9B00-D17D-3D11-D3EC6B41A54E}"/>
             </a:ext>
           </a:extLst>
         </p:cNvPr>
@@ -17964,7 +17528,7 @@
           <p:cNvPr id="3" name="Date Placeholder 2">
             <a:extLst>
               <a:ext uri="{FF2B5EF4-FFF2-40B4-BE49-F238E27FC236}">
-                <a16:creationId xmlns:a16="http://schemas.microsoft.com/office/drawing/2014/main" id="{E1E5D09F-8CDC-0731-06F6-FC70DFFA5E5B}"/>
+                <a16:creationId xmlns:a16="http://schemas.microsoft.com/office/drawing/2014/main" id="{D3A3FC5D-38A7-6106-D99B-E377EAAB508F}"/>
               </a:ext>
             </a:extLst>
           </p:cNvPr>
@@ -17993,7 +17557,7 @@
           <p:cNvPr id="4" name="Slide Number Placeholder 3">
             <a:extLst>
               <a:ext uri="{FF2B5EF4-FFF2-40B4-BE49-F238E27FC236}">
-                <a16:creationId xmlns:a16="http://schemas.microsoft.com/office/drawing/2014/main" id="{BEBA48E9-CBB9-DF3A-9864-3BAEBE7094B3}"/>
+                <a16:creationId xmlns:a16="http://schemas.microsoft.com/office/drawing/2014/main" id="{338E1671-51C7-C5B3-CDEE-1655EF8B3891}"/>
               </a:ext>
             </a:extLst>
           </p:cNvPr>
@@ -18022,7 +17586,7 @@
           <p:cNvPr id="7" name="TextBox 6">
             <a:extLst>
               <a:ext uri="{FF2B5EF4-FFF2-40B4-BE49-F238E27FC236}">
-                <a16:creationId xmlns:a16="http://schemas.microsoft.com/office/drawing/2014/main" id="{28A81B7A-D410-F8B4-FC4F-BF9B60C0F0FE}"/>
+                <a16:creationId xmlns:a16="http://schemas.microsoft.com/office/drawing/2014/main" id="{84000C52-9685-6BBB-2FEA-B906EDF58E0B}"/>
               </a:ext>
             </a:extLst>
           </p:cNvPr>
@@ -18060,7 +17624,7 @@
           <p:cNvPr id="6" name="Title 1">
             <a:extLst>
               <a:ext uri="{FF2B5EF4-FFF2-40B4-BE49-F238E27FC236}">
-                <a16:creationId xmlns:a16="http://schemas.microsoft.com/office/drawing/2014/main" id="{13BD4924-F8F2-2086-3EC8-DBE3D7AB1F3F}"/>
+                <a16:creationId xmlns:a16="http://schemas.microsoft.com/office/drawing/2014/main" id="{C748431A-A4A5-6CFA-9D41-04577CB28023}"/>
               </a:ext>
             </a:extLst>
           </p:cNvPr>
@@ -18073,7 +17637,7 @@
         </p:nvSpPr>
         <p:spPr>
           <a:xfrm>
-            <a:off x="13601" y="785017"/>
+            <a:off x="211337" y="869738"/>
             <a:ext cx="2939186" cy="2096814"/>
           </a:xfrm>
         </p:spPr>
@@ -18153,7 +17717,7 @@
           <p:cNvPr id="8" name="TextBox 7">
             <a:extLst>
               <a:ext uri="{FF2B5EF4-FFF2-40B4-BE49-F238E27FC236}">
-                <a16:creationId xmlns:a16="http://schemas.microsoft.com/office/drawing/2014/main" id="{612520B3-5AC1-1DE5-2355-E7C0A3867F07}"/>
+                <a16:creationId xmlns:a16="http://schemas.microsoft.com/office/drawing/2014/main" id="{50DC1195-0309-3E49-0AFD-EF57C13F15EA}"/>
               </a:ext>
             </a:extLst>
           </p:cNvPr>
@@ -18191,7 +17755,7 @@
           <p:cNvPr id="9" name="Title 1">
             <a:extLst>
               <a:ext uri="{FF2B5EF4-FFF2-40B4-BE49-F238E27FC236}">
-                <a16:creationId xmlns:a16="http://schemas.microsoft.com/office/drawing/2014/main" id="{EE7103D4-D9EA-E11C-6679-453CBF536828}"/>
+                <a16:creationId xmlns:a16="http://schemas.microsoft.com/office/drawing/2014/main" id="{123AFBDA-99A7-7B72-CF40-905E85DD1D51}"/>
               </a:ext>
             </a:extLst>
           </p:cNvPr>
@@ -18202,8 +17766,8 @@
         </p:nvSpPr>
         <p:spPr>
           <a:xfrm>
-            <a:off x="8806587" y="149879"/>
-            <a:ext cx="2580554" cy="486227"/>
+            <a:off x="6385330" y="222569"/>
+            <a:ext cx="4230023" cy="486227"/>
           </a:xfrm>
           <a:prstGeom prst="rect">
             <a:avLst/>
@@ -18241,7 +17805,7 @@
                 <a:latin typeface="Arial"/>
                 <a:cs typeface="Arial"/>
               </a:rPr>
-              <a:t>  </a:t>
+              <a:t>      </a:t>
             </a:r>
             <a:r>
               <a:rPr lang="en-US" sz="2100" dirty="0">
@@ -18262,7 +17826,7 @@
           <p:cNvPr id="2" name="Picture 1">
             <a:extLst>
               <a:ext uri="{FF2B5EF4-FFF2-40B4-BE49-F238E27FC236}">
-                <a16:creationId xmlns:a16="http://schemas.microsoft.com/office/drawing/2014/main" id="{F3332FFE-59ED-89A9-F8C5-29B937B2A6B3}"/>
+                <a16:creationId xmlns:a16="http://schemas.microsoft.com/office/drawing/2014/main" id="{C44D6088-A9CF-9A2E-DA70-0448707536A2}"/>
               </a:ext>
             </a:extLst>
           </p:cNvPr>
@@ -18279,38 +17843,8 @@
         </p:blipFill>
         <p:spPr>
           <a:xfrm>
-            <a:off x="2608976" y="1593956"/>
-            <a:ext cx="9396853" cy="5114165"/>
-          </a:xfrm>
-          <a:prstGeom prst="rect">
-            <a:avLst/>
-          </a:prstGeom>
-        </p:spPr>
-      </p:pic>
-      <p:pic>
-        <p:nvPicPr>
-          <p:cNvPr id="10" name="Picture 9">
-            <a:extLst>
-              <a:ext uri="{FF2B5EF4-FFF2-40B4-BE49-F238E27FC236}">
-                <a16:creationId xmlns:a16="http://schemas.microsoft.com/office/drawing/2014/main" id="{87B4614C-BB72-6299-5650-6B358752F183}"/>
-              </a:ext>
-            </a:extLst>
-          </p:cNvPr>
-          <p:cNvPicPr>
-            <a:picLocks noChangeAspect="1"/>
-          </p:cNvPicPr>
-          <p:nvPr/>
-        </p:nvPicPr>
-        <p:blipFill>
-          <a:blip r:embed="rId4"/>
-          <a:stretch>
-            <a:fillRect/>
-          </a:stretch>
-        </p:blipFill>
-        <p:spPr>
-          <a:xfrm>
-            <a:off x="4040907" y="870142"/>
-            <a:ext cx="6532989" cy="574903"/>
+            <a:off x="3770153" y="1627786"/>
+            <a:ext cx="7772400" cy="4424548"/>
           </a:xfrm>
           <a:prstGeom prst="rect">
             <a:avLst/>
@@ -18320,7 +17854,7 @@
     </p:spTree>
     <p:extLst>
       <p:ext uri="{BB962C8B-B14F-4D97-AF65-F5344CB8AC3E}">
-        <p14:creationId xmlns:p14="http://schemas.microsoft.com/office/powerpoint/2010/main" val="1342684157"/>
+        <p14:creationId xmlns:p14="http://schemas.microsoft.com/office/powerpoint/2010/main" val="1625813769"/>
       </p:ext>
     </p:extLst>
   </p:cSld>
